--- a/Comparison/总结.pptx
+++ b/Comparison/总结.pptx
@@ -6,6 +6,7 @@
   </p:sldMasterIdLst>
   <p:sldIdLst>
     <p:sldId id="256" r:id="rId3"/>
+    <p:sldId id="257" r:id="rId4"/>
   </p:sldIdLst>
   <p:sldSz cx="12192000" cy="6858000"/>
   <p:notesSz cx="6858000" cy="9144000"/>
@@ -2938,7 +2939,7 @@
         </p:nvGraphicFramePr>
         <p:xfrm>
           <a:off x="516255" y="458470"/>
-          <a:ext cx="11160125" cy="5273040"/>
+          <a:ext cx="11160125" cy="4480560"/>
         </p:xfrm>
         <a:graphic>
           <a:graphicData uri="http://schemas.openxmlformats.org/drawingml/2006/table">
@@ -2947,11 +2948,12 @@
                 <a:tableStyleId>{5C22544A-7EE6-4342-B048-85BDC9FD1C3A}</a:tableStyleId>
               </a:tblPr>
               <a:tblGrid>
-                <a:gridCol w="2232000"/>
-                <a:gridCol w="2232000"/>
-                <a:gridCol w="2232000"/>
-                <a:gridCol w="2232000"/>
-                <a:gridCol w="2232000"/>
+                <a:gridCol w="1860000"/>
+                <a:gridCol w="1860000"/>
+                <a:gridCol w="1860000"/>
+                <a:gridCol w="1860000"/>
+                <a:gridCol w="1860000"/>
+                <a:gridCol w="1860000"/>
               </a:tblGrid>
               <a:tr h="0">
                 <a:tc>
@@ -2977,6 +2979,36 @@
                         </a:solidFill>
                         <a:latin typeface="Calibri" panose="020F0502020204030204" charset="0"/>
                         <a:ea typeface="微软雅黑" panose="020B0503020204020204" charset="-122"/>
+                      </a:endParaRPr>
+                    </a:p>
+                  </a:txBody>
+                  <a:tcPr anchor="ctr" anchorCtr="0"/>
+                </a:tc>
+                <a:tc>
+                  <a:txBody>
+                    <a:bodyPr/>
+                    <a:p>
+                      <a:pPr algn="ctr">
+                        <a:buNone/>
+                      </a:pPr>
+                      <a:r>
+                        <a:rPr lang="zh-CN" altLang="en-US" sz="1400" b="0">
+                          <a:solidFill>
+                            <a:schemeClr val="tx1"/>
+                          </a:solidFill>
+                          <a:latin typeface="Calibri" panose="020F0502020204030204" charset="0"/>
+                          <a:ea typeface="微软雅黑" panose="020B0503020204020204" charset="-122"/>
+                          <a:cs typeface="Calibri" panose="020F0502020204030204" charset="0"/>
+                        </a:rPr>
+                        <a:t>简述</a:t>
+                      </a:r>
+                      <a:endParaRPr lang="zh-CN" altLang="en-US" sz="1400" b="0">
+                        <a:solidFill>
+                          <a:schemeClr val="tx1"/>
+                        </a:solidFill>
+                        <a:latin typeface="Calibri" panose="020F0502020204030204" charset="0"/>
+                        <a:ea typeface="微软雅黑" panose="020B0503020204020204" charset="-122"/>
+                        <a:cs typeface="Calibri" panose="020F0502020204030204" charset="0"/>
                       </a:endParaRPr>
                     </a:p>
                   </a:txBody>
@@ -3210,6 +3242,58 @@
                         <a:buNone/>
                       </a:pPr>
                       <a:r>
+                        <a:rPr lang="zh-CN" altLang="en-US" sz="1400" b="0">
+                          <a:solidFill>
+                            <a:schemeClr val="tx1"/>
+                          </a:solidFill>
+                          <a:latin typeface="Calibri" panose="020F0502020204030204" charset="0"/>
+                          <a:ea typeface="微软雅黑" panose="020B0503020204020204" charset="-122"/>
+                          <a:cs typeface="Calibri" panose="020F0502020204030204" charset="0"/>
+                        </a:rPr>
+                        <a:t>源端口路径控制+带内探测实现</a:t>
+                      </a:r>
+                      <a:r>
+                        <a:rPr lang="en-US" altLang="zh-CN" sz="1400" b="0">
+                          <a:solidFill>
+                            <a:schemeClr val="tx1"/>
+                          </a:solidFill>
+                          <a:latin typeface="Calibri" panose="020F0502020204030204" charset="0"/>
+                          <a:ea typeface="微软雅黑" panose="020B0503020204020204" charset="-122"/>
+                          <a:cs typeface="Calibri" panose="020F0502020204030204" charset="0"/>
+                        </a:rPr>
+                        <a:t>VPC</a:t>
+                      </a:r>
+                      <a:r>
+                        <a:rPr lang="zh-CN" altLang="en-US" sz="1400" b="0">
+                          <a:solidFill>
+                            <a:schemeClr val="tx1"/>
+                          </a:solidFill>
+                          <a:latin typeface="Calibri" panose="020F0502020204030204" charset="0"/>
+                          <a:ea typeface="微软雅黑" panose="020B0503020204020204" charset="-122"/>
+                          <a:cs typeface="Calibri" panose="020F0502020204030204" charset="0"/>
+                        </a:rPr>
+                        <a:t>亚秒级故障恢复</a:t>
+                      </a:r>
+                      <a:endParaRPr lang="zh-CN" altLang="en-US" sz="1400" b="0">
+                        <a:solidFill>
+                          <a:schemeClr val="tx1"/>
+                        </a:solidFill>
+                        <a:latin typeface="Calibri" panose="020F0502020204030204" charset="0"/>
+                        <a:ea typeface="微软雅黑" panose="020B0503020204020204" charset="-122"/>
+                        <a:cs typeface="Calibri" panose="020F0502020204030204" charset="0"/>
+                      </a:endParaRPr>
+                    </a:p>
+                  </a:txBody>
+                  <a:tcPr anchor="ctr" anchorCtr="0"/>
+                </a:tc>
+                <a:tc>
+                  <a:txBody>
+                    <a:bodyPr/>
+                    <a:p>
+                      <a:pPr algn="ctr">
+                        <a:buNone/>
+                      </a:pPr>
+                      <a:r>
                         <a:rPr lang="en-US" altLang="zh-CN" sz="1400" b="0">
                           <a:solidFill>
                             <a:schemeClr val="tx1"/>
@@ -3420,6 +3504,25 @@
                       <a:pPr algn="ctr">
                         <a:buNone/>
                       </a:pPr>
+                      <a:endParaRPr lang="zh-CN" altLang="en-US" sz="1400" b="0">
+                        <a:solidFill>
+                          <a:schemeClr val="tx1"/>
+                        </a:solidFill>
+                        <a:latin typeface="Calibri" panose="020F0502020204030204" charset="0"/>
+                        <a:ea typeface="微软雅黑" panose="020B0503020204020204" charset="-122"/>
+                        <a:cs typeface="Calibri" panose="020F0502020204030204" charset="0"/>
+                      </a:endParaRPr>
+                    </a:p>
+                  </a:txBody>
+                  <a:tcPr anchor="ctr" anchorCtr="0"/>
+                </a:tc>
+                <a:tc>
+                  <a:txBody>
+                    <a:bodyPr/>
+                    <a:p>
+                      <a:pPr algn="ctr">
+                        <a:buNone/>
+                      </a:pPr>
                       <a:r>
                         <a:rPr lang="en-US" altLang="zh-CN" sz="1400" b="0">
                           <a:solidFill>
@@ -3622,6 +3725,25 @@
                       <a:pPr algn="ctr">
                         <a:buNone/>
                       </a:pPr>
+                      <a:endParaRPr lang="zh-CN" altLang="en-US" sz="1400" b="0">
+                        <a:solidFill>
+                          <a:schemeClr val="tx1"/>
+                        </a:solidFill>
+                        <a:latin typeface="Calibri" panose="020F0502020204030204" charset="0"/>
+                        <a:ea typeface="微软雅黑" panose="020B0503020204020204" charset="-122"/>
+                        <a:cs typeface="Calibri" panose="020F0502020204030204" charset="0"/>
+                      </a:endParaRPr>
+                    </a:p>
+                  </a:txBody>
+                  <a:tcPr anchor="ctr" anchorCtr="0"/>
+                </a:tc>
+                <a:tc>
+                  <a:txBody>
+                    <a:bodyPr/>
+                    <a:p>
+                      <a:pPr algn="ctr">
+                        <a:buNone/>
+                      </a:pPr>
                       <a:r>
                         <a:rPr lang="en-US" altLang="zh-CN" sz="1400" b="0">
                           <a:solidFill>
@@ -3869,6 +3991,25 @@
                   </a:txBody>
                   <a:tcPr anchor="ctr" anchorCtr="0"/>
                 </a:tc>
+                <a:tc>
+                  <a:txBody>
+                    <a:bodyPr/>
+                    <a:p>
+                      <a:pPr algn="ctr">
+                        <a:buNone/>
+                      </a:pPr>
+                      <a:endParaRPr lang="zh-CN" altLang="en-US" sz="1400" b="0">
+                        <a:solidFill>
+                          <a:schemeClr val="tx1"/>
+                        </a:solidFill>
+                        <a:latin typeface="Calibri" panose="020F0502020204030204" charset="0"/>
+                        <a:ea typeface="微软雅黑" panose="020B0503020204020204" charset="-122"/>
+                        <a:cs typeface="Calibri" panose="020F0502020204030204" charset="0"/>
+                      </a:endParaRPr>
+                    </a:p>
+                  </a:txBody>
+                  <a:tcPr anchor="ctr" anchorCtr="0"/>
+                </a:tc>
               </a:tr>
               <a:tr h="0">
                 <a:tc>
@@ -3913,6 +4054,25 @@
                         </a:rPr>
                         <a:t>字节</a:t>
                       </a:r>
+                      <a:endParaRPr lang="zh-CN" altLang="en-US" sz="1400" b="0">
+                        <a:solidFill>
+                          <a:schemeClr val="tx1"/>
+                        </a:solidFill>
+                        <a:latin typeface="Calibri" panose="020F0502020204030204" charset="0"/>
+                        <a:ea typeface="微软雅黑" panose="020B0503020204020204" charset="-122"/>
+                        <a:cs typeface="Calibri" panose="020F0502020204030204" charset="0"/>
+                      </a:endParaRPr>
+                    </a:p>
+                  </a:txBody>
+                  <a:tcPr anchor="ctr" anchorCtr="0"/>
+                </a:tc>
+                <a:tc>
+                  <a:txBody>
+                    <a:bodyPr/>
+                    <a:p>
+                      <a:pPr algn="ctr">
+                        <a:buNone/>
+                      </a:pPr>
                       <a:endParaRPr lang="zh-CN" altLang="en-US" sz="1400" b="0">
                         <a:solidFill>
                           <a:schemeClr val="tx1"/>
@@ -4177,11 +4337,48 @@
                   </a:txBody>
                   <a:tcPr anchor="ctr" anchorCtr="0"/>
                 </a:tc>
+                <a:tc>
+                  <a:txBody>
+                    <a:bodyPr/>
+                    <a:p>
+                      <a:pPr algn="ctr">
+                        <a:buNone/>
+                      </a:pPr>
+                      <a:endParaRPr lang="zh-CN" altLang="en-US" sz="1400" b="0">
+                        <a:solidFill>
+                          <a:schemeClr val="tx1"/>
+                        </a:solidFill>
+                        <a:latin typeface="Calibri" panose="020F0502020204030204" charset="0"/>
+                        <a:ea typeface="微软雅黑" panose="020B0503020204020204" charset="-122"/>
+                        <a:cs typeface="Calibri" panose="020F0502020204030204" charset="0"/>
+                      </a:endParaRPr>
+                    </a:p>
+                  </a:txBody>
+                  <a:tcPr anchor="ctr" anchorCtr="0"/>
+                </a:tc>
               </a:tr>
             </a:tbl>
           </a:graphicData>
         </a:graphic>
       </p:graphicFrame>
+    </p:spTree>
+  </p:cSld>
+  <p:clrMapOvr>
+    <a:masterClrMapping/>
+  </p:clrMapOvr>
+</p:sld>
+</file>
+
+<file path=ppt/slides/slide2.xml><?xml version="1.0" encoding="utf-8"?>
+<p:sld xmlns:a="http://schemas.openxmlformats.org/drawingml/2006/main" xmlns:r="http://schemas.openxmlformats.org/officeDocument/2006/relationships" xmlns:p="http://schemas.openxmlformats.org/presentationml/2006/main">
+  <p:cSld>
+    <p:spTree>
+      <p:nvGrpSpPr>
+        <p:cNvPr id="1" name=""/>
+        <p:cNvGrpSpPr/>
+        <p:nvPr/>
+      </p:nvGrpSpPr>
+      <p:grpSpPr/>
       <p:sp>
         <p:nvSpPr>
           <p:cNvPr id="6" name="文本框 5"/>
@@ -4190,8 +4387,8 @@
         </p:nvSpPr>
         <p:spPr>
           <a:xfrm>
-            <a:off x="2377440" y="5314950"/>
-            <a:ext cx="6652895" cy="953135"/>
+            <a:off x="1163320" y="605155"/>
+            <a:ext cx="9654540" cy="2891790"/>
           </a:xfrm>
           <a:prstGeom prst="rect">
             <a:avLst/>
@@ -4259,6 +4456,221 @@
               <a:t>交换机才是感知路径状态的第一场所，而且不同流、不同端侧维护的路径状态信息是互不感知的，极大可能在网内碰撞，导致不断切换路径、难以收敛</a:t>
             </a:r>
             <a:endParaRPr lang="zh-CN" altLang="en-US" sz="1400">
+              <a:latin typeface="微软雅黑" panose="020B0503020204020204" charset="-122"/>
+              <a:ea typeface="微软雅黑" panose="020B0503020204020204" charset="-122"/>
+            </a:endParaRPr>
+          </a:p>
+          <a:p>
+            <a:endParaRPr lang="zh-CN" altLang="en-US" sz="1400">
+              <a:latin typeface="微软雅黑" panose="020B0503020204020204" charset="-122"/>
+              <a:ea typeface="微软雅黑" panose="020B0503020204020204" charset="-122"/>
+            </a:endParaRPr>
+          </a:p>
+          <a:p>
+            <a:r>
+              <a:rPr lang="zh-CN" altLang="en-US" sz="1400">
+                <a:latin typeface="微软雅黑" panose="020B0503020204020204" charset="-122"/>
+                <a:ea typeface="微软雅黑" panose="020B0503020204020204" charset="-122"/>
+              </a:rPr>
+              <a:t>交换机感知路径状态的周期是</a:t>
+            </a:r>
+            <a:r>
+              <a:rPr lang="en-US" altLang="zh-CN" sz="1400">
+                <a:latin typeface="微软雅黑" panose="020B0503020204020204" charset="-122"/>
+                <a:ea typeface="微软雅黑" panose="020B0503020204020204" charset="-122"/>
+              </a:rPr>
+              <a:t>4us</a:t>
+            </a:r>
+            <a:r>
+              <a:rPr lang="zh-CN" altLang="en-US" sz="1400">
+                <a:latin typeface="微软雅黑" panose="020B0503020204020204" charset="-122"/>
+                <a:ea typeface="微软雅黑" panose="020B0503020204020204" charset="-122"/>
+              </a:rPr>
+              <a:t>，端侧感知周期是</a:t>
+            </a:r>
+            <a:r>
+              <a:rPr lang="en-US" altLang="zh-CN" sz="1400">
+                <a:latin typeface="微软雅黑" panose="020B0503020204020204" charset="-122"/>
+                <a:ea typeface="微软雅黑" panose="020B0503020204020204" charset="-122"/>
+              </a:rPr>
+              <a:t>RTT</a:t>
+            </a:r>
+            <a:r>
+              <a:rPr lang="zh-CN" altLang="en-US" sz="1400">
+                <a:latin typeface="微软雅黑" panose="020B0503020204020204" charset="-122"/>
+                <a:ea typeface="微软雅黑" panose="020B0503020204020204" charset="-122"/>
+              </a:rPr>
+              <a:t>级别的</a:t>
+            </a:r>
+            <a:endParaRPr lang="zh-CN" altLang="en-US" sz="1400">
+              <a:latin typeface="微软雅黑" panose="020B0503020204020204" charset="-122"/>
+              <a:ea typeface="微软雅黑" panose="020B0503020204020204" charset="-122"/>
+            </a:endParaRPr>
+          </a:p>
+          <a:p>
+            <a:endParaRPr lang="zh-CN" altLang="en-US" sz="1400">
+              <a:latin typeface="微软雅黑" panose="020B0503020204020204" charset="-122"/>
+              <a:ea typeface="微软雅黑" panose="020B0503020204020204" charset="-122"/>
+            </a:endParaRPr>
+          </a:p>
+          <a:p>
+            <a:endParaRPr lang="zh-CN" altLang="en-US" sz="1400">
+              <a:latin typeface="微软雅黑" panose="020B0503020204020204" charset="-122"/>
+              <a:ea typeface="微软雅黑" panose="020B0503020204020204" charset="-122"/>
+            </a:endParaRPr>
+          </a:p>
+          <a:p>
+            <a:r>
+              <a:rPr lang="en-US" altLang="zh-CN" sz="1400">
+                <a:latin typeface="微软雅黑" panose="020B0503020204020204" charset="-122"/>
+                <a:ea typeface="微软雅黑" panose="020B0503020204020204" charset="-122"/>
+              </a:rPr>
+              <a:t>1</a:t>
+            </a:r>
+            <a:r>
+              <a:rPr lang="zh-CN" altLang="en-US" sz="1400">
+                <a:latin typeface="微软雅黑" panose="020B0503020204020204" charset="-122"/>
+                <a:ea typeface="微软雅黑" panose="020B0503020204020204" charset="-122"/>
+              </a:rPr>
+              <a:t>，从技术合理性上来看，端侧源路由是否有必要性？</a:t>
+            </a:r>
+            <a:endParaRPr lang="zh-CN" altLang="en-US" sz="1400">
+              <a:latin typeface="微软雅黑" panose="020B0503020204020204" charset="-122"/>
+              <a:ea typeface="微软雅黑" panose="020B0503020204020204" charset="-122"/>
+            </a:endParaRPr>
+          </a:p>
+          <a:p>
+            <a:r>
+              <a:rPr lang="en-US" altLang="zh-CN" sz="1400">
+                <a:latin typeface="微软雅黑" panose="020B0503020204020204" charset="-122"/>
+                <a:ea typeface="微软雅黑" panose="020B0503020204020204" charset="-122"/>
+              </a:rPr>
+              <a:t>——</a:t>
+            </a:r>
+            <a:r>
+              <a:rPr lang="zh-CN" altLang="en-US" sz="1400">
+                <a:latin typeface="微软雅黑" panose="020B0503020204020204" charset="-122"/>
+                <a:ea typeface="微软雅黑" panose="020B0503020204020204" charset="-122"/>
+              </a:rPr>
+              <a:t>（</a:t>
+            </a:r>
+            <a:r>
+              <a:rPr lang="en-US" altLang="zh-CN" sz="1400">
+                <a:latin typeface="微软雅黑" panose="020B0503020204020204" charset="-122"/>
+                <a:ea typeface="微软雅黑" panose="020B0503020204020204" charset="-122"/>
+              </a:rPr>
+              <a:t>1</a:t>
+            </a:r>
+            <a:r>
+              <a:rPr lang="zh-CN" altLang="en-US" sz="1400">
+                <a:latin typeface="微软雅黑" panose="020B0503020204020204" charset="-122"/>
+                <a:ea typeface="微软雅黑" panose="020B0503020204020204" charset="-122"/>
+              </a:rPr>
+              <a:t>）故障感知快，通算</a:t>
+            </a:r>
+            <a:r>
+              <a:rPr lang="en-US" altLang="zh-CN" sz="1400">
+                <a:latin typeface="微软雅黑" panose="020B0503020204020204" charset="-122"/>
+                <a:ea typeface="微软雅黑" panose="020B0503020204020204" charset="-122"/>
+              </a:rPr>
+              <a:t>Harp</a:t>
+            </a:r>
+            <a:r>
+              <a:rPr lang="zh-CN" altLang="en-US" sz="1400">
+                <a:latin typeface="微软雅黑" panose="020B0503020204020204" charset="-122"/>
+                <a:ea typeface="微软雅黑" panose="020B0503020204020204" charset="-122"/>
+              </a:rPr>
+              <a:t>、</a:t>
+            </a:r>
+            <a:r>
+              <a:rPr lang="en-US" altLang="zh-CN" sz="1400">
+                <a:latin typeface="微软雅黑" panose="020B0503020204020204" charset="-122"/>
+                <a:ea typeface="微软雅黑" panose="020B0503020204020204" charset="-122"/>
+              </a:rPr>
+              <a:t>ZooRoute</a:t>
+            </a:r>
+            <a:r>
+              <a:rPr lang="zh-CN" altLang="en-US" sz="1400">
+                <a:latin typeface="微软雅黑" panose="020B0503020204020204" charset="-122"/>
+                <a:ea typeface="微软雅黑" panose="020B0503020204020204" charset="-122"/>
+              </a:rPr>
+              <a:t>、智算</a:t>
+            </a:r>
+            <a:r>
+              <a:rPr lang="en-US" altLang="zh-CN" sz="1400">
+                <a:latin typeface="微软雅黑" panose="020B0503020204020204" charset="-122"/>
+                <a:ea typeface="微软雅黑" panose="020B0503020204020204" charset="-122"/>
+              </a:rPr>
+              <a:t>REPS</a:t>
+            </a:r>
+            <a:r>
+              <a:rPr lang="zh-CN" altLang="en-US" sz="1400">
+                <a:latin typeface="微软雅黑" panose="020B0503020204020204" charset="-122"/>
+                <a:ea typeface="微软雅黑" panose="020B0503020204020204" charset="-122"/>
+              </a:rPr>
+              <a:t>皆是此出发点</a:t>
+            </a:r>
+            <a:endParaRPr lang="zh-CN" altLang="en-US" sz="1400">
+              <a:latin typeface="微软雅黑" panose="020B0503020204020204" charset="-122"/>
+              <a:ea typeface="微软雅黑" panose="020B0503020204020204" charset="-122"/>
+            </a:endParaRPr>
+          </a:p>
+          <a:p>
+            <a:r>
+              <a:rPr lang="en-US" altLang="zh-CN" sz="1400">
+                <a:latin typeface="微软雅黑" panose="020B0503020204020204" charset="-122"/>
+                <a:ea typeface="微软雅黑" panose="020B0503020204020204" charset="-122"/>
+              </a:rPr>
+              <a:t>2</a:t>
+            </a:r>
+            <a:r>
+              <a:rPr lang="zh-CN" altLang="en-US" sz="1400">
+                <a:latin typeface="微软雅黑" panose="020B0503020204020204" charset="-122"/>
+                <a:ea typeface="微软雅黑" panose="020B0503020204020204" charset="-122"/>
+              </a:rPr>
+              <a:t>，如果源路由不如网内负载均衡，则无需继续思考</a:t>
+            </a:r>
+            <a:endParaRPr lang="en-US" altLang="zh-CN" sz="1400">
+              <a:latin typeface="微软雅黑" panose="020B0503020204020204" charset="-122"/>
+              <a:ea typeface="微软雅黑" panose="020B0503020204020204" charset="-122"/>
+            </a:endParaRPr>
+          </a:p>
+          <a:p>
+            <a:r>
+              <a:rPr lang="en-US" altLang="zh-CN" sz="1400">
+                <a:latin typeface="微软雅黑" panose="020B0503020204020204" charset="-122"/>
+                <a:ea typeface="微软雅黑" panose="020B0503020204020204" charset="-122"/>
+              </a:rPr>
+              <a:t>3</a:t>
+            </a:r>
+            <a:r>
+              <a:rPr lang="zh-CN" altLang="en-US" sz="1400">
+                <a:latin typeface="微软雅黑" panose="020B0503020204020204" charset="-122"/>
+                <a:ea typeface="微软雅黑" panose="020B0503020204020204" charset="-122"/>
+              </a:rPr>
+              <a:t>，如果源路由有价值，那么网内交换机怎么辅助它？</a:t>
+            </a:r>
+            <a:endParaRPr lang="zh-CN" altLang="en-US" sz="1400">
+              <a:latin typeface="微软雅黑" panose="020B0503020204020204" charset="-122"/>
+              <a:ea typeface="微软雅黑" panose="020B0503020204020204" charset="-122"/>
+            </a:endParaRPr>
+          </a:p>
+          <a:p>
+            <a:r>
+              <a:rPr lang="en-US" altLang="zh-CN" sz="1400">
+                <a:latin typeface="微软雅黑" panose="020B0503020204020204" charset="-122"/>
+                <a:ea typeface="微软雅黑" panose="020B0503020204020204" charset="-122"/>
+              </a:rPr>
+              <a:t>——</a:t>
+            </a:r>
+            <a:r>
+              <a:rPr lang="zh-CN" altLang="en-US" sz="1400">
+                <a:latin typeface="微软雅黑" panose="020B0503020204020204" charset="-122"/>
+                <a:ea typeface="微软雅黑" panose="020B0503020204020204" charset="-122"/>
+              </a:rPr>
+              <a:t>比如，交换机根据当前路径状态动态哈希</a:t>
+            </a:r>
+            <a:endParaRPr lang="en-US" altLang="zh-CN" sz="1400">
               <a:latin typeface="微软雅黑" panose="020B0503020204020204" charset="-122"/>
               <a:ea typeface="微软雅黑" panose="020B0503020204020204" charset="-122"/>
             </a:endParaRPr>

--- a/Comparison/总结.pptx
+++ b/Comparison/总结.pptx
@@ -7,6 +7,8 @@
   <p:sldIdLst>
     <p:sldId id="256" r:id="rId3"/>
     <p:sldId id="257" r:id="rId4"/>
+    <p:sldId id="260" r:id="rId5"/>
+    <p:sldId id="258" r:id="rId6"/>
   </p:sldIdLst>
   <p:sldSz cx="12192000" cy="6858000"/>
   <p:notesSz cx="6858000" cy="9144000"/>
@@ -4685,6 +4687,303 @@
 </p:sld>
 </file>
 
+<file path=ppt/slides/slide3.xml><?xml version="1.0" encoding="utf-8"?>
+<p:sld xmlns:a="http://schemas.openxmlformats.org/drawingml/2006/main" xmlns:r="http://schemas.openxmlformats.org/officeDocument/2006/relationships" xmlns:p="http://schemas.openxmlformats.org/presentationml/2006/main">
+  <p:cSld>
+    <p:spTree>
+      <p:nvGrpSpPr>
+        <p:cNvPr id="1" name=""/>
+        <p:cNvGrpSpPr/>
+        <p:nvPr/>
+      </p:nvGrpSpPr>
+      <p:grpSpPr/>
+      <p:sp>
+        <p:nvSpPr>
+          <p:cNvPr id="2" name="标题 1"/>
+          <p:cNvSpPr>
+            <a:spLocks noGrp="1"/>
+          </p:cNvSpPr>
+          <p:nvPr>
+            <p:ph type="title"/>
+          </p:nvPr>
+        </p:nvSpPr>
+        <p:spPr/>
+        <p:txBody>
+          <a:bodyPr/>
+          <a:p>
+            <a:r>
+              <a:rPr lang="en-US" altLang="zh-CN"/>
+              <a:t>REPS</a:t>
+            </a:r>
+            <a:r>
+              <a:rPr lang="zh-CN" altLang="en-US"/>
+              <a:t>论文分析</a:t>
+            </a:r>
+            <a:endParaRPr lang="zh-CN" altLang="en-US"/>
+          </a:p>
+        </p:txBody>
+      </p:sp>
+      <p:pic>
+        <p:nvPicPr>
+          <p:cNvPr id="4" name="内容占位符 3"/>
+          <p:cNvPicPr>
+            <a:picLocks noChangeAspect="1"/>
+          </p:cNvPicPr>
+          <p:nvPr>
+            <p:ph idx="1"/>
+          </p:nvPr>
+        </p:nvPicPr>
+        <p:blipFill>
+          <a:blip r:embed="rId1"/>
+          <a:stretch>
+            <a:fillRect/>
+          </a:stretch>
+        </p:blipFill>
+        <p:spPr>
+          <a:xfrm>
+            <a:off x="838200" y="2150745"/>
+            <a:ext cx="5006340" cy="3202940"/>
+          </a:xfrm>
+          <a:prstGeom prst="rect">
+            <a:avLst/>
+          </a:prstGeom>
+        </p:spPr>
+      </p:pic>
+      <p:sp>
+        <p:nvSpPr>
+          <p:cNvPr id="5" name="文本框 4"/>
+          <p:cNvSpPr txBox="1"/>
+          <p:nvPr/>
+        </p:nvSpPr>
+        <p:spPr>
+          <a:xfrm>
+            <a:off x="7192645" y="3928745"/>
+            <a:ext cx="4064000" cy="1198880"/>
+          </a:xfrm>
+          <a:prstGeom prst="rect">
+            <a:avLst/>
+          </a:prstGeom>
+          <a:noFill/>
+        </p:spPr>
+        <p:txBody>
+          <a:bodyPr wrap="square" rtlCol="0">
+            <a:spAutoFit/>
+          </a:bodyPr>
+          <a:p>
+            <a:r>
+              <a:rPr lang="zh-CN" altLang="en-US"/>
+              <a:t>通过丢包检测故障</a:t>
+            </a:r>
+            <a:endParaRPr lang="zh-CN" altLang="en-US"/>
+          </a:p>
+          <a:p>
+            <a:r>
+              <a:rPr lang="zh-CN" altLang="en-US"/>
+              <a:t>通过超时识别丢包</a:t>
+            </a:r>
+            <a:endParaRPr lang="zh-CN" altLang="en-US"/>
+          </a:p>
+          <a:p>
+            <a:r>
+              <a:rPr lang="zh-CN" altLang="en-US"/>
+              <a:t>丢包类别：故障丢包，拥塞丢包</a:t>
+            </a:r>
+            <a:endParaRPr lang="zh-CN" altLang="en-US"/>
+          </a:p>
+          <a:p>
+            <a:r>
+              <a:rPr lang="zh-CN" altLang="en-US"/>
+              <a:t>两种方式区分丢包：</a:t>
+            </a:r>
+            <a:r>
+              <a:rPr lang="en-US" altLang="zh-CN"/>
+              <a:t>trimming</a:t>
+            </a:r>
+            <a:r>
+              <a:rPr lang="zh-CN" altLang="en-US"/>
+              <a:t>、或</a:t>
+            </a:r>
+            <a:r>
+              <a:rPr lang="en-US" altLang="zh-CN"/>
+              <a:t>RTT</a:t>
+            </a:r>
+            <a:endParaRPr lang="en-US" altLang="zh-CN"/>
+          </a:p>
+        </p:txBody>
+      </p:sp>
+      <p:sp>
+        <p:nvSpPr>
+          <p:cNvPr id="6" name="文本框 5"/>
+          <p:cNvSpPr txBox="1"/>
+          <p:nvPr/>
+        </p:nvSpPr>
+        <p:spPr>
+          <a:xfrm>
+            <a:off x="7319645" y="1824990"/>
+            <a:ext cx="4064000" cy="368300"/>
+          </a:xfrm>
+          <a:prstGeom prst="rect">
+            <a:avLst/>
+          </a:prstGeom>
+          <a:noFill/>
+        </p:spPr>
+        <p:txBody>
+          <a:bodyPr wrap="square" rtlCol="0">
+            <a:spAutoFit/>
+          </a:bodyPr>
+          <a:p>
+            <a:r>
+              <a:rPr lang="en-US" altLang="zh-CN"/>
+              <a:t>8</a:t>
+            </a:r>
+            <a:r>
+              <a:rPr lang="zh-CN" altLang="en-US"/>
+              <a:t>个</a:t>
+            </a:r>
+            <a:r>
+              <a:rPr lang="en-US" altLang="zh-CN"/>
+              <a:t>EV</a:t>
+            </a:r>
+            <a:endParaRPr lang="en-US" altLang="zh-CN"/>
+          </a:p>
+        </p:txBody>
+      </p:sp>
+    </p:spTree>
+  </p:cSld>
+  <p:clrMapOvr>
+    <a:masterClrMapping/>
+  </p:clrMapOvr>
+</p:sld>
+</file>
+
+<file path=ppt/slides/slide4.xml><?xml version="1.0" encoding="utf-8"?>
+<p:sld xmlns:a="http://schemas.openxmlformats.org/drawingml/2006/main" xmlns:r="http://schemas.openxmlformats.org/officeDocument/2006/relationships" xmlns:p="http://schemas.openxmlformats.org/presentationml/2006/main">
+  <p:cSld>
+    <p:spTree>
+      <p:nvGrpSpPr>
+        <p:cNvPr id="1" name=""/>
+        <p:cNvGrpSpPr/>
+        <p:nvPr/>
+      </p:nvGrpSpPr>
+      <p:grpSpPr/>
+      <p:sp>
+        <p:nvSpPr>
+          <p:cNvPr id="2" name="文本框 1"/>
+          <p:cNvSpPr txBox="1"/>
+          <p:nvPr/>
+        </p:nvSpPr>
+        <p:spPr>
+          <a:xfrm>
+            <a:off x="2409825" y="826135"/>
+            <a:ext cx="7717790" cy="2584450"/>
+          </a:xfrm>
+          <a:prstGeom prst="rect">
+            <a:avLst/>
+          </a:prstGeom>
+          <a:noFill/>
+        </p:spPr>
+        <p:txBody>
+          <a:bodyPr wrap="square" rtlCol="0">
+            <a:spAutoFit/>
+          </a:bodyPr>
+          <a:p>
+            <a:r>
+              <a:rPr lang="zh-CN" altLang="en-US"/>
+              <a:t>三类异常包：故障丢包、拥塞丢包、乱序包</a:t>
+            </a:r>
+            <a:endParaRPr lang="zh-CN" altLang="en-US"/>
+          </a:p>
+          <a:p>
+            <a:endParaRPr lang="zh-CN" altLang="en-US"/>
+          </a:p>
+          <a:p>
+            <a:r>
+              <a:rPr lang="en-US" altLang="zh-CN"/>
+              <a:t>trimming</a:t>
+            </a:r>
+            <a:r>
+              <a:rPr lang="zh-CN" altLang="en-US"/>
+              <a:t>只能标记拥塞丢包，但无法区分故障丢包和乱序包</a:t>
+            </a:r>
+            <a:endParaRPr lang="zh-CN" altLang="en-US"/>
+          </a:p>
+          <a:p>
+            <a:r>
+              <a:rPr lang="en-US" altLang="zh-CN"/>
+              <a:t>SACK/NACK</a:t>
+            </a:r>
+            <a:r>
+              <a:rPr lang="zh-CN" altLang="en-US"/>
+              <a:t>无法区分丢包和乱序包</a:t>
+            </a:r>
+            <a:endParaRPr lang="zh-CN" altLang="en-US"/>
+          </a:p>
+          <a:p>
+            <a:endParaRPr lang="zh-CN" altLang="en-US"/>
+          </a:p>
+          <a:p>
+            <a:r>
+              <a:rPr lang="zh-CN" altLang="en-US"/>
+              <a:t>现有故障丢包只能通过发送端超时来触发</a:t>
+            </a:r>
+            <a:endParaRPr lang="zh-CN" altLang="en-US"/>
+          </a:p>
+          <a:p>
+            <a:r>
+              <a:rPr lang="en-US" altLang="zh-CN"/>
+              <a:t>——</a:t>
+            </a:r>
+            <a:r>
+              <a:rPr lang="zh-CN" altLang="en-US"/>
+              <a:t>交换机多久能检测到故障（</a:t>
+            </a:r>
+            <a:r>
+              <a:rPr lang="en-US" altLang="zh-CN"/>
+              <a:t>1us</a:t>
+            </a:r>
+            <a:r>
+              <a:rPr lang="zh-CN" altLang="en-US"/>
+              <a:t>能识别到光电信号丢失，但控制面故障收敛需要</a:t>
+            </a:r>
+            <a:r>
+              <a:rPr lang="en-US" altLang="zh-CN"/>
+              <a:t>10ms</a:t>
+            </a:r>
+            <a:r>
+              <a:rPr lang="zh-CN" altLang="en-US"/>
+              <a:t>以上）？检测到故障，通知给哪个发送端呢？</a:t>
+            </a:r>
+            <a:endParaRPr lang="zh-CN" altLang="en-US"/>
+          </a:p>
+          <a:p>
+            <a:r>
+              <a:rPr lang="en-US" altLang="zh-CN"/>
+              <a:t>——</a:t>
+            </a:r>
+            <a:r>
+              <a:rPr lang="zh-CN" altLang="en-US"/>
+              <a:t>另外，可以通过</a:t>
+            </a:r>
+            <a:r>
+              <a:rPr lang="en-US" altLang="zh-CN"/>
+              <a:t>probing</a:t>
+            </a:r>
+            <a:r>
+              <a:rPr lang="zh-CN" altLang="en-US"/>
+              <a:t>来更快检测到故障，但复杂度稍高</a:t>
+            </a:r>
+            <a:endParaRPr lang="zh-CN" altLang="en-US"/>
+          </a:p>
+        </p:txBody>
+      </p:sp>
+    </p:spTree>
+  </p:cSld>
+  <p:clrMapOvr>
+    <a:masterClrMapping/>
+  </p:clrMapOvr>
+</p:sld>
+</file>
+
 <file path=ppt/theme/theme1.xml><?xml version="1.0" encoding="utf-8"?>
 <a:theme xmlns:a="http://schemas.openxmlformats.org/drawingml/2006/main" name="WPS">
   <a:themeElements>

--- a/Comparison/总结.pptx
+++ b/Comparison/总结.pptx
@@ -7,8 +7,12 @@
   <p:sldIdLst>
     <p:sldId id="256" r:id="rId3"/>
     <p:sldId id="257" r:id="rId4"/>
-    <p:sldId id="260" r:id="rId5"/>
-    <p:sldId id="258" r:id="rId6"/>
+    <p:sldId id="261" r:id="rId5"/>
+    <p:sldId id="264" r:id="rId6"/>
+    <p:sldId id="260" r:id="rId7"/>
+    <p:sldId id="266" r:id="rId8"/>
+    <p:sldId id="258" r:id="rId9"/>
+    <p:sldId id="265" r:id="rId10"/>
   </p:sldIdLst>
   <p:sldSz cx="12192000" cy="6858000"/>
   <p:notesSz cx="6858000" cy="9144000"/>
@@ -115,7 +119,7 @@
             <a:srgbClr val="A4A3A4"/>
           </p15:clr>
         </p15:guide>
-        <p15:guide id="2" pos="3840" userDrawn="1">
+        <p15:guide id="2" pos="3839" userDrawn="1">
           <p15:clr>
             <a:srgbClr val="A4A3A4"/>
           </p15:clr>
@@ -4703,23 +4707,1389 @@
           <p:cNvSpPr>
             <a:spLocks noGrp="1"/>
           </p:cNvSpPr>
+          <p:nvPr/>
+        </p:nvSpPr>
+        <p:spPr>
+          <a:xfrm>
+            <a:off x="838200" y="365125"/>
+            <a:ext cx="10515600" cy="1325563"/>
+          </a:xfrm>
+          <a:prstGeom prst="rect">
+            <a:avLst/>
+          </a:prstGeom>
+        </p:spPr>
+        <p:txBody>
+          <a:bodyPr vert="horz" lIns="91440" tIns="45720" rIns="91440" bIns="45720" rtlCol="0" anchor="ctr">
+            <a:normAutofit/>
+          </a:bodyPr>
+          <a:lstStyle>
+            <a:lvl1pPr algn="l" defTabSz="914400" rtl="0" eaLnBrk="1" latinLnBrk="0" hangingPunct="1">
+              <a:lnSpc>
+                <a:spcPct val="90000"/>
+              </a:lnSpc>
+              <a:spcBef>
+                <a:spcPct val="0"/>
+              </a:spcBef>
+              <a:buNone/>
+              <a:defRPr sz="4400" kern="1200">
+                <a:solidFill>
+                  <a:schemeClr val="tx1"/>
+                </a:solidFill>
+                <a:latin typeface="+mj-lt"/>
+                <a:ea typeface="+mj-ea"/>
+                <a:cs typeface="+mj-cs"/>
+              </a:defRPr>
+            </a:lvl1pPr>
+          </a:lstStyle>
+          <a:p>
+            <a:r>
+              <a:rPr lang="zh-CN" altLang="en-US"/>
+              <a:t>网络故障的影响</a:t>
+            </a:r>
+            <a:endParaRPr lang="zh-CN" altLang="en-US"/>
+          </a:p>
+        </p:txBody>
+      </p:sp>
+      <p:sp>
+        <p:nvSpPr>
+          <p:cNvPr id="3" name="文本框 2"/>
+          <p:cNvSpPr txBox="1"/>
+          <p:nvPr/>
+        </p:nvSpPr>
+        <p:spPr>
+          <a:xfrm>
+            <a:off x="986155" y="1738630"/>
+            <a:ext cx="9072880" cy="2466975"/>
+          </a:xfrm>
+          <a:prstGeom prst="rect">
+            <a:avLst/>
+          </a:prstGeom>
+        </p:spPr>
+        <p:txBody>
+          <a:bodyPr wrap="square">
+            <a:spAutoFit/>
+          </a:bodyPr>
+          <a:p>
+            <a:pPr>
+              <a:lnSpc>
+                <a:spcPts val="1425"/>
+              </a:lnSpc>
+            </a:pPr>
+            <a:r>
+              <a:rPr lang="en-US" altLang="zh-CN" sz="1200" b="1">
+                <a:solidFill>
+                  <a:schemeClr val="tx1"/>
+                </a:solidFill>
+                <a:latin typeface="微软雅黑" panose="020B0503020204020204" charset="-122"/>
+                <a:ea typeface="微软雅黑" panose="020B0503020204020204" charset="-122"/>
+                <a:cs typeface="微软雅黑" panose="020B0503020204020204" charset="-122"/>
+              </a:rPr>
+              <a:t>Source</a:t>
+            </a:r>
+            <a:r>
+              <a:rPr lang="zh-CN" altLang="en-US" sz="1200" b="1">
+                <a:solidFill>
+                  <a:schemeClr val="tx1"/>
+                </a:solidFill>
+                <a:latin typeface="微软雅黑" panose="020B0503020204020204" charset="-122"/>
+                <a:ea typeface="微软雅黑" panose="020B0503020204020204" charset="-122"/>
+                <a:cs typeface="微软雅黑" panose="020B0503020204020204" charset="-122"/>
+              </a:rPr>
+              <a:t>：</a:t>
+            </a:r>
+            <a:r>
+              <a:rPr lang="en-US" altLang="zh-CN" sz="1200" b="1">
+                <a:solidFill>
+                  <a:schemeClr val="tx1"/>
+                </a:solidFill>
+                <a:latin typeface="微软雅黑" panose="020B0503020204020204" charset="-122"/>
+                <a:ea typeface="微软雅黑" panose="020B0503020204020204" charset="-122"/>
+                <a:cs typeface="微软雅黑" panose="020B0503020204020204" charset="-122"/>
+              </a:rPr>
+              <a:t>REPS</a:t>
+            </a:r>
+            <a:endParaRPr lang="en-US" altLang="zh-CN" sz="1200" b="0">
+              <a:solidFill>
+                <a:schemeClr val="tx1"/>
+              </a:solidFill>
+              <a:latin typeface="微软雅黑" panose="020B0503020204020204" charset="-122"/>
+              <a:ea typeface="微软雅黑" panose="020B0503020204020204" charset="-122"/>
+              <a:cs typeface="微软雅黑" panose="020B0503020204020204" charset="-122"/>
+            </a:endParaRPr>
+          </a:p>
+          <a:p>
+            <a:pPr>
+              <a:lnSpc>
+                <a:spcPts val="1425"/>
+              </a:lnSpc>
+            </a:pPr>
+            <a:endParaRPr lang="en-US" altLang="zh-CN" sz="1200" b="0">
+              <a:solidFill>
+                <a:schemeClr val="tx1"/>
+              </a:solidFill>
+              <a:latin typeface="微软雅黑" panose="020B0503020204020204" charset="-122"/>
+              <a:ea typeface="微软雅黑" panose="020B0503020204020204" charset="-122"/>
+              <a:cs typeface="微软雅黑" panose="020B0503020204020204" charset="-122"/>
+            </a:endParaRPr>
+          </a:p>
+          <a:p>
+            <a:pPr>
+              <a:lnSpc>
+                <a:spcPts val="1425"/>
+              </a:lnSpc>
+            </a:pPr>
+            <a:r>
+              <a:rPr lang="en-US" altLang="zh-CN" sz="1200" b="0">
+                <a:solidFill>
+                  <a:schemeClr val="tx1"/>
+                </a:solidFill>
+                <a:latin typeface="微软雅黑" panose="020B0503020204020204" charset="-122"/>
+                <a:ea typeface="微软雅黑" panose="020B0503020204020204" charset="-122"/>
+                <a:cs typeface="微软雅黑" panose="020B0503020204020204" charset="-122"/>
+              </a:rPr>
+              <a:t>1</a:t>
+            </a:r>
+            <a:r>
+              <a:rPr lang="zh-CN" altLang="en-US" sz="1200" b="0">
+                <a:solidFill>
+                  <a:schemeClr val="tx1"/>
+                </a:solidFill>
+                <a:latin typeface="微软雅黑" panose="020B0503020204020204" charset="-122"/>
+                <a:ea typeface="微软雅黑" panose="020B0503020204020204" charset="-122"/>
+                <a:cs typeface="微软雅黑" panose="020B0503020204020204" charset="-122"/>
+              </a:rPr>
+              <a:t>，强力</a:t>
+            </a:r>
+            <a:r>
+              <a:rPr lang="en-US" altLang="zh-CN" sz="1200" b="0">
+                <a:solidFill>
+                  <a:schemeClr val="tx1"/>
+                </a:solidFill>
+                <a:latin typeface="微软雅黑" panose="020B0503020204020204" charset="-122"/>
+                <a:ea typeface="微软雅黑" panose="020B0503020204020204" charset="-122"/>
+                <a:cs typeface="微软雅黑" panose="020B0503020204020204" charset="-122"/>
+              </a:rPr>
+              <a:t>Motivation</a:t>
+            </a:r>
+            <a:r>
+              <a:rPr lang="zh-CN" altLang="en-US" sz="1200" b="0">
+                <a:solidFill>
+                  <a:schemeClr val="tx1"/>
+                </a:solidFill>
+                <a:latin typeface="微软雅黑" panose="020B0503020204020204" charset="-122"/>
+                <a:ea typeface="微软雅黑" panose="020B0503020204020204" charset="-122"/>
+                <a:cs typeface="微软雅黑" panose="020B0503020204020204" charset="-122"/>
+              </a:rPr>
+              <a:t>：</a:t>
+            </a:r>
+            <a:endParaRPr lang="zh-CN" altLang="en-US" sz="1200" b="0">
+              <a:solidFill>
+                <a:schemeClr val="tx1"/>
+              </a:solidFill>
+              <a:latin typeface="微软雅黑" panose="020B0503020204020204" charset="-122"/>
+              <a:ea typeface="微软雅黑" panose="020B0503020204020204" charset="-122"/>
+              <a:cs typeface="微软雅黑" panose="020B0503020204020204" charset="-122"/>
+            </a:endParaRPr>
+          </a:p>
+          <a:p>
+            <a:pPr>
+              <a:lnSpc>
+                <a:spcPts val="1425"/>
+              </a:lnSpc>
+            </a:pPr>
+            <a:r>
+              <a:rPr lang="zh-CN" altLang="en-US" sz="1200" b="0">
+                <a:solidFill>
+                  <a:schemeClr val="tx1"/>
+                </a:solidFill>
+                <a:latin typeface="微软雅黑" panose="020B0503020204020204" charset="-122"/>
+                <a:ea typeface="微软雅黑" panose="020B0503020204020204" charset="-122"/>
+                <a:cs typeface="微软雅黑" panose="020B0503020204020204" charset="-122"/>
+              </a:rPr>
+              <a:t>近期研究表明，链路故障对训练时间和经济成本的影响极为严重</a:t>
+            </a:r>
+            <a:r>
+              <a:rPr lang="en-US" altLang="zh-CN" sz="1200" b="0">
+                <a:solidFill>
+                  <a:schemeClr val="tx1"/>
+                </a:solidFill>
+                <a:latin typeface="微软雅黑" panose="020B0503020204020204" charset="-122"/>
+                <a:ea typeface="微软雅黑" panose="020B0503020204020204" charset="-122"/>
+                <a:cs typeface="微软雅黑" panose="020B0503020204020204" charset="-122"/>
+              </a:rPr>
+              <a:t>——</a:t>
+            </a:r>
+            <a:r>
+              <a:rPr lang="zh-CN" altLang="en-US" sz="1200" b="0">
+                <a:solidFill>
+                  <a:schemeClr val="tx1"/>
+                </a:solidFill>
+                <a:latin typeface="微软雅黑" panose="020B0503020204020204" charset="-122"/>
+                <a:ea typeface="微软雅黑" panose="020B0503020204020204" charset="-122"/>
+                <a:cs typeface="微软雅黑" panose="020B0503020204020204" charset="-122"/>
+              </a:rPr>
+              <a:t>单条链路故障在分布式训练负载中的成本影响可达云负载的约 </a:t>
+            </a:r>
+            <a:r>
+              <a:rPr lang="en-US" altLang="zh-CN" sz="1200" b="0">
+                <a:solidFill>
+                  <a:schemeClr val="tx1"/>
+                </a:solidFill>
+                <a:latin typeface="微软雅黑" panose="020B0503020204020204" charset="-122"/>
+                <a:ea typeface="微软雅黑" panose="020B0503020204020204" charset="-122"/>
+                <a:cs typeface="微软雅黑" panose="020B0503020204020204" charset="-122"/>
+              </a:rPr>
+              <a:t>20 </a:t>
+            </a:r>
+            <a:r>
+              <a:rPr lang="zh-CN" altLang="en-US" sz="1200" b="0">
+                <a:solidFill>
+                  <a:schemeClr val="tx1"/>
+                </a:solidFill>
+                <a:latin typeface="微软雅黑" panose="020B0503020204020204" charset="-122"/>
+                <a:ea typeface="微软雅黑" panose="020B0503020204020204" charset="-122"/>
+                <a:cs typeface="微软雅黑" panose="020B0503020204020204" charset="-122"/>
+              </a:rPr>
+              <a:t>倍 </a:t>
+            </a:r>
+            <a:r>
+              <a:rPr lang="en-US" altLang="zh-CN" sz="1200" b="0">
+                <a:solidFill>
+                  <a:schemeClr val="tx1"/>
+                </a:solidFill>
+                <a:latin typeface="微软雅黑" panose="020B0503020204020204" charset="-122"/>
+                <a:ea typeface="微软雅黑" panose="020B0503020204020204" charset="-122"/>
+                <a:cs typeface="微软雅黑" panose="020B0503020204020204" charset="-122"/>
+              </a:rPr>
+              <a:t>[25, 54]</a:t>
+            </a:r>
+            <a:r>
+              <a:rPr lang="zh-CN" altLang="en-US" sz="1200" b="0">
+                <a:solidFill>
+                  <a:schemeClr val="tx1"/>
+                </a:solidFill>
+                <a:latin typeface="微软雅黑" panose="020B0503020204020204" charset="-122"/>
+                <a:ea typeface="微软雅黑" panose="020B0503020204020204" charset="-122"/>
+                <a:cs typeface="微软雅黑" panose="020B0503020204020204" charset="-122"/>
+              </a:rPr>
+              <a:t>。加之系统规模仍在持续增长，凸显了对一种传输层的需求：其负载均衡方案必须能近乎即时地（如在几个往返时延 </a:t>
+            </a:r>
+            <a:r>
+              <a:rPr lang="en-US" altLang="zh-CN" sz="1200" b="0">
+                <a:solidFill>
+                  <a:schemeClr val="tx1"/>
+                </a:solidFill>
+                <a:latin typeface="微软雅黑" panose="020B0503020204020204" charset="-122"/>
+                <a:ea typeface="微软雅黑" panose="020B0503020204020204" charset="-122"/>
+                <a:cs typeface="微软雅黑" panose="020B0503020204020204" charset="-122"/>
+              </a:rPr>
+              <a:t>RTT </a:t>
+            </a:r>
+            <a:r>
+              <a:rPr lang="zh-CN" altLang="en-US" sz="1200" b="0">
+                <a:solidFill>
+                  <a:schemeClr val="tx1"/>
+                </a:solidFill>
+                <a:latin typeface="微软雅黑" panose="020B0503020204020204" charset="-122"/>
+                <a:ea typeface="微软雅黑" panose="020B0503020204020204" charset="-122"/>
+                <a:cs typeface="微软雅黑" panose="020B0503020204020204" charset="-122"/>
+              </a:rPr>
+              <a:t>内）适应网络故障以及由此带来的拓扑带宽不对称。</a:t>
+            </a:r>
+            <a:endParaRPr lang="zh-CN" altLang="en-US" sz="1200" b="0">
+              <a:solidFill>
+                <a:schemeClr val="tx1"/>
+              </a:solidFill>
+              <a:latin typeface="微软雅黑" panose="020B0503020204020204" charset="-122"/>
+              <a:ea typeface="微软雅黑" panose="020B0503020204020204" charset="-122"/>
+              <a:cs typeface="微软雅黑" panose="020B0503020204020204" charset="-122"/>
+            </a:endParaRPr>
+          </a:p>
+          <a:p>
+            <a:pPr>
+              <a:lnSpc>
+                <a:spcPts val="1425"/>
+              </a:lnSpc>
+            </a:pPr>
+            <a:r>
+              <a:rPr lang="en-US" altLang="zh-CN" sz="1200" b="0">
+                <a:solidFill>
+                  <a:schemeClr val="tx1"/>
+                </a:solidFill>
+                <a:latin typeface="微软雅黑" panose="020B0503020204020204" charset="-122"/>
+                <a:ea typeface="微软雅黑" panose="020B0503020204020204" charset="-122"/>
+                <a:cs typeface="微软雅黑" panose="020B0503020204020204" charset="-122"/>
+              </a:rPr>
+              <a:t>————</a:t>
+            </a:r>
+            <a:r>
+              <a:rPr lang="zh-CN" altLang="en-US" sz="1200" b="0">
+                <a:solidFill>
+                  <a:schemeClr val="tx1"/>
+                </a:solidFill>
+                <a:latin typeface="微软雅黑" panose="020B0503020204020204" charset="-122"/>
+                <a:ea typeface="微软雅黑" panose="020B0503020204020204" charset="-122"/>
+                <a:cs typeface="微软雅黑" panose="020B0503020204020204" charset="-122"/>
+              </a:rPr>
+              <a:t>假设排除一条故障电缆并将其从路由组中移除需要</a:t>
+            </a:r>
+            <a:r>
+              <a:rPr lang="en-US" altLang="zh-CN" sz="1200" b="0">
+                <a:solidFill>
+                  <a:schemeClr val="tx1"/>
+                </a:solidFill>
+                <a:latin typeface="微软雅黑" panose="020B0503020204020204" charset="-122"/>
+                <a:ea typeface="微软雅黑" panose="020B0503020204020204" charset="-122"/>
+                <a:cs typeface="微软雅黑" panose="020B0503020204020204" charset="-122"/>
+              </a:rPr>
+              <a:t>10ms</a:t>
+            </a:r>
+            <a:r>
+              <a:rPr lang="zh-CN" altLang="en-US" sz="1200" b="0">
+                <a:solidFill>
+                  <a:schemeClr val="tx1"/>
+                </a:solidFill>
+                <a:latin typeface="微软雅黑" panose="020B0503020204020204" charset="-122"/>
+                <a:ea typeface="微软雅黑" panose="020B0503020204020204" charset="-122"/>
+                <a:cs typeface="微软雅黑" panose="020B0503020204020204" charset="-122"/>
+              </a:rPr>
+              <a:t>，在此过渡期间数据包仍会被路由到该故障组，导致丢包。具体而言，以 </a:t>
+            </a:r>
+            <a:r>
+              <a:rPr lang="en-US" altLang="zh-CN" sz="1200" b="0">
+                <a:solidFill>
+                  <a:schemeClr val="tx1"/>
+                </a:solidFill>
+                <a:latin typeface="微软雅黑" panose="020B0503020204020204" charset="-122"/>
+                <a:ea typeface="微软雅黑" panose="020B0503020204020204" charset="-122"/>
+                <a:cs typeface="微软雅黑" panose="020B0503020204020204" charset="-122"/>
+              </a:rPr>
+              <a:t>4 KiB MTU </a:t>
+            </a:r>
+            <a:r>
+              <a:rPr lang="zh-CN" altLang="en-US" sz="1200" b="0">
+                <a:solidFill>
+                  <a:schemeClr val="tx1"/>
+                </a:solidFill>
+                <a:latin typeface="微软雅黑" panose="020B0503020204020204" charset="-122"/>
+                <a:ea typeface="微软雅黑" panose="020B0503020204020204" charset="-122"/>
+                <a:cs typeface="微软雅黑" panose="020B0503020204020204" charset="-122"/>
+              </a:rPr>
+              <a:t>和 </a:t>
+            </a:r>
+            <a:r>
+              <a:rPr lang="en-US" altLang="zh-CN" sz="1200" b="0">
+                <a:solidFill>
+                  <a:schemeClr val="tx1"/>
+                </a:solidFill>
+                <a:latin typeface="微软雅黑" panose="020B0503020204020204" charset="-122"/>
+                <a:ea typeface="微软雅黑" panose="020B0503020204020204" charset="-122"/>
+                <a:cs typeface="微软雅黑" panose="020B0503020204020204" charset="-122"/>
+              </a:rPr>
+              <a:t>400 Gbps </a:t>
+            </a:r>
+            <a:r>
+              <a:rPr lang="zh-CN" altLang="en-US" sz="1200" b="0">
+                <a:solidFill>
+                  <a:schemeClr val="tx1"/>
+                </a:solidFill>
+                <a:latin typeface="微软雅黑" panose="020B0503020204020204" charset="-122"/>
+                <a:ea typeface="微软雅黑" panose="020B0503020204020204" charset="-122"/>
+                <a:cs typeface="微软雅黑" panose="020B0503020204020204" charset="-122"/>
+              </a:rPr>
+              <a:t>链路计算，将可能导致超过 </a:t>
+            </a:r>
+            <a:r>
+              <a:rPr lang="en-US" altLang="zh-CN" sz="1200" b="0">
+                <a:solidFill>
+                  <a:schemeClr val="tx1"/>
+                </a:solidFill>
+                <a:latin typeface="微软雅黑" panose="020B0503020204020204" charset="-122"/>
+                <a:ea typeface="微软雅黑" panose="020B0503020204020204" charset="-122"/>
+                <a:cs typeface="微软雅黑" panose="020B0503020204020204" charset="-122"/>
+              </a:rPr>
+              <a:t>120000 </a:t>
+            </a:r>
+            <a:r>
+              <a:rPr lang="zh-CN" altLang="en-US" sz="1200" b="0">
+                <a:solidFill>
+                  <a:schemeClr val="tx1"/>
+                </a:solidFill>
+                <a:latin typeface="微软雅黑" panose="020B0503020204020204" charset="-122"/>
+                <a:ea typeface="微软雅黑" panose="020B0503020204020204" charset="-122"/>
+                <a:cs typeface="微软雅黑" panose="020B0503020204020204" charset="-122"/>
+              </a:rPr>
+              <a:t>个数据包（约 </a:t>
+            </a:r>
+            <a:r>
+              <a:rPr lang="en-US" altLang="zh-CN" sz="1200" b="0">
+                <a:solidFill>
+                  <a:schemeClr val="tx1"/>
+                </a:solidFill>
+                <a:latin typeface="微软雅黑" panose="020B0503020204020204" charset="-122"/>
+                <a:ea typeface="微软雅黑" panose="020B0503020204020204" charset="-122"/>
+                <a:cs typeface="微软雅黑" panose="020B0503020204020204" charset="-122"/>
+              </a:rPr>
+              <a:t>0.5 GB</a:t>
+            </a:r>
+            <a:r>
+              <a:rPr lang="zh-CN" altLang="en-US" sz="1200" b="0">
+                <a:solidFill>
+                  <a:schemeClr val="tx1"/>
+                </a:solidFill>
+                <a:latin typeface="微软雅黑" panose="020B0503020204020204" charset="-122"/>
+                <a:ea typeface="微软雅黑" panose="020B0503020204020204" charset="-122"/>
+                <a:cs typeface="微软雅黑" panose="020B0503020204020204" charset="-122"/>
+              </a:rPr>
+              <a:t>）的丢失（不计拥塞控制的影响）</a:t>
+            </a:r>
+            <a:endParaRPr lang="zh-CN" altLang="en-US" sz="1200" b="0">
+              <a:solidFill>
+                <a:schemeClr val="tx1"/>
+              </a:solidFill>
+              <a:latin typeface="微软雅黑" panose="020B0503020204020204" charset="-122"/>
+              <a:ea typeface="微软雅黑" panose="020B0503020204020204" charset="-122"/>
+              <a:cs typeface="微软雅黑" panose="020B0503020204020204" charset="-122"/>
+            </a:endParaRPr>
+          </a:p>
+          <a:p>
+            <a:pPr>
+              <a:lnSpc>
+                <a:spcPts val="1425"/>
+              </a:lnSpc>
+            </a:pPr>
+            <a:endParaRPr lang="zh-CN" altLang="en-US" sz="1200" b="0">
+              <a:solidFill>
+                <a:schemeClr val="tx1"/>
+              </a:solidFill>
+              <a:latin typeface="微软雅黑" panose="020B0503020204020204" charset="-122"/>
+              <a:ea typeface="微软雅黑" panose="020B0503020204020204" charset="-122"/>
+              <a:cs typeface="微软雅黑" panose="020B0503020204020204" charset="-122"/>
+            </a:endParaRPr>
+          </a:p>
+          <a:p>
+            <a:pPr>
+              <a:lnSpc>
+                <a:spcPts val="1425"/>
+              </a:lnSpc>
+            </a:pPr>
+            <a:r>
+              <a:rPr lang="en-US" altLang="zh-CN" sz="1200" b="0">
+                <a:solidFill>
+                  <a:schemeClr val="tx1"/>
+                </a:solidFill>
+                <a:latin typeface="微软雅黑" panose="020B0503020204020204" charset="-122"/>
+                <a:ea typeface="微软雅黑" panose="020B0503020204020204" charset="-122"/>
+                <a:cs typeface="微软雅黑" panose="020B0503020204020204" charset="-122"/>
+              </a:rPr>
+              <a:t>2</a:t>
+            </a:r>
+            <a:r>
+              <a:rPr lang="zh-CN" altLang="en-US" sz="1200" b="0">
+                <a:solidFill>
+                  <a:schemeClr val="tx1"/>
+                </a:solidFill>
+                <a:latin typeface="微软雅黑" panose="020B0503020204020204" charset="-122"/>
+                <a:ea typeface="微软雅黑" panose="020B0503020204020204" charset="-122"/>
+                <a:cs typeface="微软雅黑" panose="020B0503020204020204" charset="-122"/>
+              </a:rPr>
+              <a:t>，现有方案在故障场景下有何不足？</a:t>
+            </a:r>
+            <a:endParaRPr lang="zh-CN" altLang="en-US" sz="1200" b="0">
+              <a:solidFill>
+                <a:schemeClr val="tx1"/>
+              </a:solidFill>
+              <a:latin typeface="微软雅黑" panose="020B0503020204020204" charset="-122"/>
+              <a:ea typeface="微软雅黑" panose="020B0503020204020204" charset="-122"/>
+              <a:cs typeface="微软雅黑" panose="020B0503020204020204" charset="-122"/>
+            </a:endParaRPr>
+          </a:p>
+          <a:p>
+            <a:pPr>
+              <a:lnSpc>
+                <a:spcPts val="1425"/>
+              </a:lnSpc>
+            </a:pPr>
+            <a:r>
+              <a:rPr lang="zh-CN" altLang="en-US" sz="1200" b="0">
+                <a:solidFill>
+                  <a:schemeClr val="tx1"/>
+                </a:solidFill>
+                <a:latin typeface="微软雅黑" panose="020B0503020204020204" charset="-122"/>
+                <a:ea typeface="微软雅黑" panose="020B0503020204020204" charset="-122"/>
+                <a:cs typeface="微软雅黑" panose="020B0503020204020204" charset="-122"/>
+              </a:rPr>
+              <a:t>论文在</a:t>
+            </a:r>
+            <a:r>
+              <a:rPr lang="en-US" altLang="zh-CN" sz="1200" b="0">
+                <a:solidFill>
+                  <a:schemeClr val="tx1"/>
+                </a:solidFill>
+                <a:latin typeface="微软雅黑" panose="020B0503020204020204" charset="-122"/>
+                <a:ea typeface="微软雅黑" panose="020B0503020204020204" charset="-122"/>
+                <a:cs typeface="微软雅黑" panose="020B0503020204020204" charset="-122"/>
+              </a:rPr>
+              <a:t>Introducetion</a:t>
+            </a:r>
+            <a:r>
+              <a:rPr lang="zh-CN" altLang="en-US" sz="1200" b="0">
+                <a:solidFill>
+                  <a:schemeClr val="tx1"/>
+                </a:solidFill>
+                <a:latin typeface="微软雅黑" panose="020B0503020204020204" charset="-122"/>
+                <a:ea typeface="微软雅黑" panose="020B0503020204020204" charset="-122"/>
+                <a:cs typeface="微软雅黑" panose="020B0503020204020204" charset="-122"/>
+              </a:rPr>
+              <a:t>中声称，现有负载均衡方案在故障场景下的负载均衡效果差、无法规避故障路径，论文所提的</a:t>
+            </a:r>
+            <a:r>
+              <a:rPr lang="en-US" altLang="zh-CN" sz="1200" b="0">
+                <a:solidFill>
+                  <a:schemeClr val="tx1"/>
+                </a:solidFill>
+                <a:latin typeface="微软雅黑" panose="020B0503020204020204" charset="-122"/>
+                <a:ea typeface="微软雅黑" panose="020B0503020204020204" charset="-122"/>
+                <a:cs typeface="微软雅黑" panose="020B0503020204020204" charset="-122"/>
+              </a:rPr>
+              <a:t>REPS</a:t>
+            </a:r>
+            <a:r>
+              <a:rPr lang="zh-CN" altLang="en-US" sz="1200" b="0">
+                <a:solidFill>
+                  <a:schemeClr val="tx1"/>
+                </a:solidFill>
+                <a:latin typeface="微软雅黑" panose="020B0503020204020204" charset="-122"/>
+                <a:ea typeface="微软雅黑" panose="020B0503020204020204" charset="-122"/>
+                <a:cs typeface="微软雅黑" panose="020B0503020204020204" charset="-122"/>
+              </a:rPr>
+              <a:t>则是能在</a:t>
+            </a:r>
+            <a:r>
+              <a:rPr lang="en-US" altLang="zh-CN" sz="1200" b="0">
+                <a:solidFill>
+                  <a:schemeClr val="tx1"/>
+                </a:solidFill>
+                <a:latin typeface="微软雅黑" panose="020B0503020204020204" charset="-122"/>
+                <a:ea typeface="微软雅黑" panose="020B0503020204020204" charset="-122"/>
+                <a:cs typeface="微软雅黑" panose="020B0503020204020204" charset="-122"/>
+              </a:rPr>
+              <a:t>100us</a:t>
+            </a:r>
+            <a:r>
+              <a:rPr lang="zh-CN" altLang="en-US" sz="1200" b="0">
+                <a:solidFill>
+                  <a:schemeClr val="tx1"/>
+                </a:solidFill>
+                <a:latin typeface="微软雅黑" panose="020B0503020204020204" charset="-122"/>
+                <a:ea typeface="微软雅黑" panose="020B0503020204020204" charset="-122"/>
+                <a:cs typeface="微软雅黑" panose="020B0503020204020204" charset="-122"/>
+              </a:rPr>
+              <a:t>内快速感知并规避故障路径，并且基于逐包实现良好的负载均衡效果。</a:t>
+            </a:r>
+            <a:endParaRPr lang="zh-CN" altLang="en-US" sz="1200" b="0">
+              <a:solidFill>
+                <a:schemeClr val="tx1"/>
+              </a:solidFill>
+              <a:latin typeface="微软雅黑" panose="020B0503020204020204" charset="-122"/>
+              <a:ea typeface="微软雅黑" panose="020B0503020204020204" charset="-122"/>
+              <a:cs typeface="微软雅黑" panose="020B0503020204020204" charset="-122"/>
+            </a:endParaRPr>
+          </a:p>
+          <a:p>
+            <a:pPr>
+              <a:lnSpc>
+                <a:spcPts val="1425"/>
+              </a:lnSpc>
+            </a:pPr>
+            <a:r>
+              <a:rPr lang="zh-CN" altLang="en-US" sz="1200" b="0">
+                <a:solidFill>
+                  <a:schemeClr val="tx1"/>
+                </a:solidFill>
+                <a:latin typeface="微软雅黑" panose="020B0503020204020204" charset="-122"/>
+                <a:ea typeface="微软雅黑" panose="020B0503020204020204" charset="-122"/>
+                <a:cs typeface="微软雅黑" panose="020B0503020204020204" charset="-122"/>
+              </a:rPr>
+              <a:t>【</a:t>
+            </a:r>
+            <a:r>
+              <a:rPr lang="en-US" altLang="zh-CN" sz="1200" b="0">
+                <a:solidFill>
+                  <a:schemeClr val="tx1"/>
+                </a:solidFill>
+                <a:latin typeface="微软雅黑" panose="020B0503020204020204" charset="-122"/>
+                <a:ea typeface="微软雅黑" panose="020B0503020204020204" charset="-122"/>
+                <a:cs typeface="微软雅黑" panose="020B0503020204020204" charset="-122"/>
+              </a:rPr>
+              <a:t>REPS</a:t>
+            </a:r>
+            <a:r>
+              <a:rPr lang="zh-CN" altLang="en-US" sz="1200" b="0">
+                <a:solidFill>
+                  <a:schemeClr val="tx1"/>
+                </a:solidFill>
+                <a:latin typeface="微软雅黑" panose="020B0503020204020204" charset="-122"/>
+                <a:ea typeface="微软雅黑" panose="020B0503020204020204" charset="-122"/>
+                <a:cs typeface="微软雅黑" panose="020B0503020204020204" charset="-122"/>
+              </a:rPr>
+              <a:t>不仅规避故障，而且负载均衡】</a:t>
+            </a:r>
+            <a:endParaRPr lang="zh-CN" altLang="en-US" sz="1200" b="0">
+              <a:solidFill>
+                <a:schemeClr val="tx1"/>
+              </a:solidFill>
+              <a:latin typeface="微软雅黑" panose="020B0503020204020204" charset="-122"/>
+              <a:ea typeface="微软雅黑" panose="020B0503020204020204" charset="-122"/>
+              <a:cs typeface="微软雅黑" panose="020B0503020204020204" charset="-122"/>
+            </a:endParaRPr>
+          </a:p>
+        </p:txBody>
+      </p:sp>
+    </p:spTree>
+  </p:cSld>
+  <p:clrMapOvr>
+    <a:masterClrMapping/>
+  </p:clrMapOvr>
+</p:sld>
+</file>
+
+<file path=ppt/slides/slide4.xml><?xml version="1.0" encoding="utf-8"?>
+<p:sld xmlns:a="http://schemas.openxmlformats.org/drawingml/2006/main" xmlns:r="http://schemas.openxmlformats.org/officeDocument/2006/relationships" xmlns:p="http://schemas.openxmlformats.org/presentationml/2006/main">
+  <p:cSld>
+    <p:spTree>
+      <p:nvGrpSpPr>
+        <p:cNvPr id="1" name=""/>
+        <p:cNvGrpSpPr/>
+        <p:nvPr/>
+      </p:nvGrpSpPr>
+      <p:grpSpPr/>
+      <p:pic>
+        <p:nvPicPr>
+          <p:cNvPr id="2" name="图片 1"/>
+          <p:cNvPicPr>
+            <a:picLocks noChangeAspect="1"/>
+          </p:cNvPicPr>
+          <p:nvPr/>
+        </p:nvPicPr>
+        <p:blipFill>
+          <a:blip r:embed="rId1"/>
+          <a:stretch>
+            <a:fillRect/>
+          </a:stretch>
+        </p:blipFill>
+        <p:spPr>
+          <a:xfrm>
+            <a:off x="2935605" y="2816225"/>
+            <a:ext cx="6467475" cy="3943350"/>
+          </a:xfrm>
+          <a:prstGeom prst="rect">
+            <a:avLst/>
+          </a:prstGeom>
+        </p:spPr>
+      </p:pic>
+      <p:sp>
+        <p:nvSpPr>
+          <p:cNvPr id="3" name="文本框 2"/>
+          <p:cNvSpPr txBox="1"/>
+          <p:nvPr/>
+        </p:nvSpPr>
+        <p:spPr>
+          <a:xfrm>
+            <a:off x="444500" y="177800"/>
+            <a:ext cx="11247755" cy="2649855"/>
+          </a:xfrm>
+          <a:prstGeom prst="rect">
+            <a:avLst/>
+          </a:prstGeom>
+        </p:spPr>
+        <p:txBody>
+          <a:bodyPr wrap="square">
+            <a:spAutoFit/>
+          </a:bodyPr>
+          <a:p>
+            <a:pPr>
+              <a:lnSpc>
+                <a:spcPts val="1425"/>
+              </a:lnSpc>
+            </a:pPr>
+            <a:r>
+              <a:rPr lang="en-US" altLang="zh-CN" sz="1200" b="1">
+                <a:solidFill>
+                  <a:schemeClr val="tx1"/>
+                </a:solidFill>
+                <a:latin typeface="微软雅黑" panose="020B0503020204020204" charset="-122"/>
+                <a:ea typeface="微软雅黑" panose="020B0503020204020204" charset="-122"/>
+                <a:cs typeface="微软雅黑" panose="020B0503020204020204" charset="-122"/>
+              </a:rPr>
+              <a:t>Source</a:t>
+            </a:r>
+            <a:r>
+              <a:rPr lang="zh-CN" altLang="en-US" sz="1200" b="1">
+                <a:solidFill>
+                  <a:schemeClr val="tx1"/>
+                </a:solidFill>
+                <a:latin typeface="微软雅黑" panose="020B0503020204020204" charset="-122"/>
+                <a:ea typeface="微软雅黑" panose="020B0503020204020204" charset="-122"/>
+                <a:cs typeface="微软雅黑" panose="020B0503020204020204" charset="-122"/>
+              </a:rPr>
+              <a:t>：</a:t>
+            </a:r>
+            <a:r>
+              <a:rPr lang="en-US" altLang="zh-CN" sz="1200" b="1">
+                <a:solidFill>
+                  <a:schemeClr val="tx1"/>
+                </a:solidFill>
+                <a:latin typeface="微软雅黑" panose="020B0503020204020204" charset="-122"/>
+                <a:ea typeface="微软雅黑" panose="020B0503020204020204" charset="-122"/>
+                <a:cs typeface="微软雅黑" panose="020B0503020204020204" charset="-122"/>
+              </a:rPr>
+              <a:t>MRC</a:t>
+            </a:r>
+            <a:endParaRPr lang="en-US" altLang="zh-CN" sz="1200" b="0">
+              <a:solidFill>
+                <a:schemeClr val="tx1"/>
+              </a:solidFill>
+              <a:latin typeface="微软雅黑" panose="020B0503020204020204" charset="-122"/>
+              <a:ea typeface="微软雅黑" panose="020B0503020204020204" charset="-122"/>
+              <a:cs typeface="微软雅黑" panose="020B0503020204020204" charset="-122"/>
+            </a:endParaRPr>
+          </a:p>
+          <a:p>
+            <a:pPr>
+              <a:lnSpc>
+                <a:spcPts val="1425"/>
+              </a:lnSpc>
+            </a:pPr>
+            <a:endParaRPr lang="en-US" altLang="zh-CN" sz="1200" b="0">
+              <a:solidFill>
+                <a:schemeClr val="tx1"/>
+              </a:solidFill>
+              <a:latin typeface="微软雅黑" panose="020B0503020204020204" charset="-122"/>
+              <a:ea typeface="微软雅黑" panose="020B0503020204020204" charset="-122"/>
+              <a:cs typeface="微软雅黑" panose="020B0503020204020204" charset="-122"/>
+            </a:endParaRPr>
+          </a:p>
+          <a:p>
+            <a:pPr>
+              <a:lnSpc>
+                <a:spcPts val="1425"/>
+              </a:lnSpc>
+            </a:pPr>
+            <a:r>
+              <a:rPr lang="en-US" altLang="zh-CN" sz="1200" b="0">
+                <a:solidFill>
+                  <a:schemeClr val="tx1"/>
+                </a:solidFill>
+                <a:latin typeface="微软雅黑" panose="020B0503020204020204" charset="-122"/>
+                <a:ea typeface="微软雅黑" panose="020B0503020204020204" charset="-122"/>
+                <a:cs typeface="微软雅黑" panose="020B0503020204020204" charset="-122"/>
+              </a:rPr>
+              <a:t>1</a:t>
+            </a:r>
+            <a:r>
+              <a:rPr lang="zh-CN" altLang="en-US" sz="1200" b="0">
+                <a:solidFill>
+                  <a:schemeClr val="tx1"/>
+                </a:solidFill>
+                <a:latin typeface="微软雅黑" panose="020B0503020204020204" charset="-122"/>
+                <a:ea typeface="微软雅黑" panose="020B0503020204020204" charset="-122"/>
+                <a:cs typeface="微软雅黑" panose="020B0503020204020204" charset="-122"/>
+              </a:rPr>
+              <a:t>，</a:t>
+            </a:r>
+            <a:r>
+              <a:rPr lang="en-US" altLang="zh-CN" sz="1200" b="0">
+                <a:solidFill>
+                  <a:schemeClr val="tx1"/>
+                </a:solidFill>
+                <a:latin typeface="微软雅黑" panose="020B0503020204020204" charset="-122"/>
+                <a:ea typeface="微软雅黑" panose="020B0503020204020204" charset="-122"/>
+                <a:cs typeface="微软雅黑" panose="020B0503020204020204" charset="-122"/>
+              </a:rPr>
+              <a:t>Link Flaps</a:t>
+            </a:r>
+            <a:r>
+              <a:rPr lang="zh-CN" altLang="en-US" sz="1200" b="0">
+                <a:solidFill>
+                  <a:schemeClr val="tx1"/>
+                </a:solidFill>
+                <a:latin typeface="微软雅黑" panose="020B0503020204020204" charset="-122"/>
+                <a:ea typeface="微软雅黑" panose="020B0503020204020204" charset="-122"/>
+                <a:cs typeface="微软雅黑" panose="020B0503020204020204" charset="-122"/>
+              </a:rPr>
+              <a:t>：由于</a:t>
+            </a:r>
+            <a:r>
+              <a:rPr lang="zh-CN" altLang="en-US" sz="1200">
+                <a:latin typeface="微软雅黑" panose="020B0503020204020204" charset="-122"/>
+                <a:ea typeface="微软雅黑" panose="020B0503020204020204" charset="-122"/>
+                <a:cs typeface="微软雅黑" panose="020B0503020204020204" charset="-122"/>
+                <a:sym typeface="+mn-ea"/>
+              </a:rPr>
+              <a:t>光模块故障、光纤连接松动、温度漂移等，</a:t>
+            </a:r>
+            <a:r>
+              <a:rPr lang="zh-CN" altLang="en-US" sz="1200" b="0">
+                <a:solidFill>
+                  <a:schemeClr val="tx1"/>
+                </a:solidFill>
+                <a:latin typeface="微软雅黑" panose="020B0503020204020204" charset="-122"/>
+                <a:ea typeface="微软雅黑" panose="020B0503020204020204" charset="-122"/>
+                <a:cs typeface="微软雅黑" panose="020B0503020204020204" charset="-122"/>
+              </a:rPr>
+              <a:t>一条物理链路的状态在 </a:t>
+            </a:r>
+            <a:r>
+              <a:rPr lang="en-US" altLang="zh-CN" sz="1200" b="0">
+                <a:solidFill>
+                  <a:schemeClr val="tx1"/>
+                </a:solidFill>
+                <a:latin typeface="微软雅黑" panose="020B0503020204020204" charset="-122"/>
+                <a:ea typeface="微软雅黑" panose="020B0503020204020204" charset="-122"/>
+                <a:cs typeface="微软雅黑" panose="020B0503020204020204" charset="-122"/>
+              </a:rPr>
+              <a:t>up（</a:t>
+            </a:r>
+            <a:r>
+              <a:rPr lang="zh-CN" altLang="en-US" sz="1200" b="0">
+                <a:solidFill>
+                  <a:schemeClr val="tx1"/>
+                </a:solidFill>
+                <a:latin typeface="微软雅黑" panose="020B0503020204020204" charset="-122"/>
+                <a:ea typeface="微软雅黑" panose="020B0503020204020204" charset="-122"/>
+                <a:cs typeface="微软雅黑" panose="020B0503020204020204" charset="-122"/>
+              </a:rPr>
+              <a:t>正常）↔ </a:t>
+            </a:r>
+            <a:r>
+              <a:rPr lang="en-US" altLang="zh-CN" sz="1200" b="0">
+                <a:solidFill>
+                  <a:schemeClr val="tx1"/>
+                </a:solidFill>
+                <a:latin typeface="微软雅黑" panose="020B0503020204020204" charset="-122"/>
+                <a:ea typeface="微软雅黑" panose="020B0503020204020204" charset="-122"/>
+                <a:cs typeface="微软雅黑" panose="020B0503020204020204" charset="-122"/>
+              </a:rPr>
+              <a:t>down（</a:t>
+            </a:r>
+            <a:r>
+              <a:rPr lang="zh-CN" altLang="en-US" sz="1200" b="0">
+                <a:solidFill>
+                  <a:schemeClr val="tx1"/>
+                </a:solidFill>
+                <a:latin typeface="微软雅黑" panose="020B0503020204020204" charset="-122"/>
+                <a:ea typeface="微软雅黑" panose="020B0503020204020204" charset="-122"/>
+                <a:cs typeface="微软雅黑" panose="020B0503020204020204" charset="-122"/>
+              </a:rPr>
+              <a:t>断开）之间反复切换。</a:t>
+            </a:r>
+            <a:endParaRPr lang="zh-CN" altLang="en-US" sz="1200" b="0">
+              <a:solidFill>
+                <a:schemeClr val="tx1"/>
+              </a:solidFill>
+              <a:latin typeface="微软雅黑" panose="020B0503020204020204" charset="-122"/>
+              <a:ea typeface="微软雅黑" panose="020B0503020204020204" charset="-122"/>
+              <a:cs typeface="微软雅黑" panose="020B0503020204020204" charset="-122"/>
+            </a:endParaRPr>
+          </a:p>
+          <a:p>
+            <a:pPr>
+              <a:lnSpc>
+                <a:spcPts val="1425"/>
+              </a:lnSpc>
+            </a:pPr>
+            <a:r>
+              <a:rPr lang="zh-CN" altLang="en-US" sz="1200" b="0">
+                <a:solidFill>
+                  <a:schemeClr val="tx1"/>
+                </a:solidFill>
+                <a:latin typeface="微软雅黑" panose="020B0503020204020204" charset="-122"/>
+                <a:ea typeface="微软雅黑" panose="020B0503020204020204" charset="-122"/>
+                <a:cs typeface="微软雅黑" panose="020B0503020204020204" charset="-122"/>
+              </a:rPr>
+              <a:t> 每次 </a:t>
+            </a:r>
+            <a:r>
+              <a:rPr lang="en-US" altLang="zh-CN" sz="1200" b="0">
+                <a:solidFill>
+                  <a:schemeClr val="tx1"/>
+                </a:solidFill>
+                <a:latin typeface="微软雅黑" panose="020B0503020204020204" charset="-122"/>
+                <a:ea typeface="微软雅黑" panose="020B0503020204020204" charset="-122"/>
+                <a:cs typeface="微软雅黑" panose="020B0503020204020204" charset="-122"/>
+              </a:rPr>
+              <a:t>up→down→up </a:t>
+            </a:r>
+            <a:r>
+              <a:rPr lang="zh-CN" altLang="en-US" sz="1200" b="0">
+                <a:solidFill>
+                  <a:schemeClr val="tx1"/>
+                </a:solidFill>
+                <a:latin typeface="微软雅黑" panose="020B0503020204020204" charset="-122"/>
+                <a:ea typeface="微软雅黑" panose="020B0503020204020204" charset="-122"/>
+                <a:cs typeface="微软雅黑" panose="020B0503020204020204" charset="-122"/>
+              </a:rPr>
+              <a:t>都会触发：                                                                           </a:t>
+            </a:r>
+            <a:endParaRPr lang="zh-CN" altLang="en-US" sz="1200" b="0">
+              <a:solidFill>
+                <a:schemeClr val="tx1"/>
+              </a:solidFill>
+              <a:latin typeface="微软雅黑" panose="020B0503020204020204" charset="-122"/>
+              <a:ea typeface="微软雅黑" panose="020B0503020204020204" charset="-122"/>
+              <a:cs typeface="微软雅黑" panose="020B0503020204020204" charset="-122"/>
+            </a:endParaRPr>
+          </a:p>
+          <a:p>
+            <a:pPr>
+              <a:lnSpc>
+                <a:spcPts val="1425"/>
+              </a:lnSpc>
+            </a:pPr>
+            <a:r>
+              <a:rPr lang="zh-CN" altLang="en-US" sz="1200" b="0">
+                <a:solidFill>
+                  <a:schemeClr val="tx1"/>
+                </a:solidFill>
+                <a:latin typeface="微软雅黑" panose="020B0503020204020204" charset="-122"/>
+                <a:ea typeface="微软雅黑" panose="020B0503020204020204" charset="-122"/>
+                <a:cs typeface="微软雅黑" panose="020B0503020204020204" charset="-122"/>
+              </a:rPr>
+              <a:t>     1. 路由协议（</a:t>
+            </a:r>
+            <a:r>
+              <a:rPr lang="en-US" altLang="zh-CN" sz="1200" b="0">
+                <a:solidFill>
+                  <a:schemeClr val="tx1"/>
+                </a:solidFill>
+                <a:latin typeface="微软雅黑" panose="020B0503020204020204" charset="-122"/>
+                <a:ea typeface="微软雅黑" panose="020B0503020204020204" charset="-122"/>
+                <a:cs typeface="微软雅黑" panose="020B0503020204020204" charset="-122"/>
+              </a:rPr>
+              <a:t>BGP）</a:t>
+            </a:r>
+            <a:r>
+              <a:rPr lang="zh-CN" altLang="en-US" sz="1200" b="0">
+                <a:solidFill>
+                  <a:schemeClr val="tx1"/>
+                </a:solidFill>
+                <a:latin typeface="微软雅黑" panose="020B0503020204020204" charset="-122"/>
+                <a:ea typeface="微软雅黑" panose="020B0503020204020204" charset="-122"/>
+                <a:cs typeface="微软雅黑" panose="020B0503020204020204" charset="-122"/>
+              </a:rPr>
+              <a:t>重新收敛，反复通告路由变化                                                         </a:t>
+            </a:r>
+            <a:endParaRPr lang="zh-CN" altLang="en-US" sz="1200" b="0">
+              <a:solidFill>
+                <a:schemeClr val="tx1"/>
+              </a:solidFill>
+              <a:latin typeface="微软雅黑" panose="020B0503020204020204" charset="-122"/>
+              <a:ea typeface="微软雅黑" panose="020B0503020204020204" charset="-122"/>
+              <a:cs typeface="微软雅黑" panose="020B0503020204020204" charset="-122"/>
+            </a:endParaRPr>
+          </a:p>
+          <a:p>
+            <a:pPr>
+              <a:lnSpc>
+                <a:spcPts val="1425"/>
+              </a:lnSpc>
+            </a:pPr>
+            <a:r>
+              <a:rPr lang="zh-CN" altLang="en-US" sz="1200" b="0">
+                <a:solidFill>
+                  <a:schemeClr val="tx1"/>
+                </a:solidFill>
+                <a:latin typeface="微软雅黑" panose="020B0503020204020204" charset="-122"/>
+                <a:ea typeface="微软雅黑" panose="020B0503020204020204" charset="-122"/>
+                <a:cs typeface="微软雅黑" panose="020B0503020204020204" charset="-122"/>
+              </a:rPr>
+              <a:t>     2. 数据面黑洞（</a:t>
+            </a:r>
+            <a:r>
+              <a:rPr lang="en-US" altLang="zh-CN" sz="1200" b="0">
+                <a:solidFill>
+                  <a:schemeClr val="tx1"/>
+                </a:solidFill>
+                <a:latin typeface="微软雅黑" panose="020B0503020204020204" charset="-122"/>
+                <a:ea typeface="微软雅黑" panose="020B0503020204020204" charset="-122"/>
+                <a:cs typeface="微软雅黑" panose="020B0503020204020204" charset="-122"/>
+              </a:rPr>
+              <a:t>down </a:t>
+            </a:r>
+            <a:r>
+              <a:rPr lang="zh-CN" altLang="en-US" sz="1200" b="0">
+                <a:solidFill>
+                  <a:schemeClr val="tx1"/>
+                </a:solidFill>
+                <a:latin typeface="微软雅黑" panose="020B0503020204020204" charset="-122"/>
+                <a:ea typeface="微软雅黑" panose="020B0503020204020204" charset="-122"/>
+                <a:cs typeface="微软雅黑" panose="020B0503020204020204" charset="-122"/>
+              </a:rPr>
+              <a:t>期间流量丢失）                                                                   </a:t>
+            </a:r>
+            <a:endParaRPr lang="zh-CN" altLang="en-US" sz="1200" b="0">
+              <a:solidFill>
+                <a:schemeClr val="tx1"/>
+              </a:solidFill>
+              <a:latin typeface="微软雅黑" panose="020B0503020204020204" charset="-122"/>
+              <a:ea typeface="微软雅黑" panose="020B0503020204020204" charset="-122"/>
+              <a:cs typeface="微软雅黑" panose="020B0503020204020204" charset="-122"/>
+            </a:endParaRPr>
+          </a:p>
+          <a:p>
+            <a:pPr>
+              <a:lnSpc>
+                <a:spcPts val="1425"/>
+              </a:lnSpc>
+            </a:pPr>
+            <a:r>
+              <a:rPr lang="en-US" altLang="zh-CN" sz="1200" b="0">
+                <a:solidFill>
+                  <a:schemeClr val="tx1"/>
+                </a:solidFill>
+                <a:latin typeface="微软雅黑" panose="020B0503020204020204" charset="-122"/>
+                <a:ea typeface="微软雅黑" panose="020B0503020204020204" charset="-122"/>
+                <a:cs typeface="微软雅黑" panose="020B0503020204020204" charset="-122"/>
+              </a:rPr>
+              <a:t>     3. ECMP </a:t>
+            </a:r>
+            <a:r>
+              <a:rPr lang="zh-CN" altLang="en-US" sz="1200" b="0">
+                <a:solidFill>
+                  <a:schemeClr val="tx1"/>
+                </a:solidFill>
+                <a:latin typeface="微软雅黑" panose="020B0503020204020204" charset="-122"/>
+                <a:ea typeface="微软雅黑" panose="020B0503020204020204" charset="-122"/>
+                <a:cs typeface="微软雅黑" panose="020B0503020204020204" charset="-122"/>
+              </a:rPr>
+              <a:t>集合变化 → 哈希重映射 → 大范围乱序                                                           </a:t>
+            </a:r>
+            <a:endParaRPr lang="zh-CN" altLang="en-US" sz="1200" b="0">
+              <a:solidFill>
+                <a:schemeClr val="tx1"/>
+              </a:solidFill>
+              <a:latin typeface="微软雅黑" panose="020B0503020204020204" charset="-122"/>
+              <a:ea typeface="微软雅黑" panose="020B0503020204020204" charset="-122"/>
+              <a:cs typeface="微软雅黑" panose="020B0503020204020204" charset="-122"/>
+            </a:endParaRPr>
+          </a:p>
+          <a:p>
+            <a:pPr>
+              <a:lnSpc>
+                <a:spcPts val="1425"/>
+              </a:lnSpc>
+            </a:pPr>
+            <a:r>
+              <a:rPr lang="zh-CN" altLang="en-US" sz="1200" b="0">
+                <a:solidFill>
+                  <a:schemeClr val="tx1"/>
+                </a:solidFill>
+                <a:latin typeface="微软雅黑" panose="020B0503020204020204" charset="-122"/>
+                <a:ea typeface="微软雅黑" panose="020B0503020204020204" charset="-122"/>
+                <a:cs typeface="微软雅黑" panose="020B0503020204020204" charset="-122"/>
+              </a:rPr>
+              <a:t>     4. 运维人员要反复处理告警        </a:t>
+            </a:r>
+            <a:endParaRPr lang="zh-CN" altLang="en-US" sz="1200" b="0">
+              <a:solidFill>
+                <a:schemeClr val="tx1"/>
+              </a:solidFill>
+              <a:latin typeface="微软雅黑" panose="020B0503020204020204" charset="-122"/>
+              <a:ea typeface="微软雅黑" panose="020B0503020204020204" charset="-122"/>
+              <a:cs typeface="微软雅黑" panose="020B0503020204020204" charset="-122"/>
+            </a:endParaRPr>
+          </a:p>
+          <a:p>
+            <a:pPr>
+              <a:lnSpc>
+                <a:spcPts val="1425"/>
+              </a:lnSpc>
+            </a:pPr>
+            <a:endParaRPr lang="zh-CN" altLang="en-US" sz="1200" b="0">
+              <a:solidFill>
+                <a:schemeClr val="tx1"/>
+              </a:solidFill>
+              <a:latin typeface="微软雅黑" panose="020B0503020204020204" charset="-122"/>
+              <a:ea typeface="微软雅黑" panose="020B0503020204020204" charset="-122"/>
+              <a:cs typeface="微软雅黑" panose="020B0503020204020204" charset="-122"/>
+            </a:endParaRPr>
+          </a:p>
+          <a:p>
+            <a:pPr>
+              <a:lnSpc>
+                <a:spcPts val="1425"/>
+              </a:lnSpc>
+            </a:pPr>
+            <a:r>
+              <a:rPr lang="zh-CN" altLang="en-US" sz="1200">
+                <a:latin typeface="微软雅黑" panose="020B0503020204020204" charset="-122"/>
+                <a:ea typeface="微软雅黑" panose="020B0503020204020204" charset="-122"/>
+                <a:cs typeface="微软雅黑" panose="020B0503020204020204" charset="-122"/>
+                <a:sym typeface="+mn-ea"/>
+              </a:rPr>
+              <a:t>在 </a:t>
+            </a:r>
+            <a:r>
+              <a:rPr lang="en-US" altLang="zh-CN" sz="1200">
+                <a:latin typeface="微软雅黑" panose="020B0503020204020204" charset="-122"/>
+                <a:ea typeface="微软雅黑" panose="020B0503020204020204" charset="-122"/>
+                <a:cs typeface="微软雅黑" panose="020B0503020204020204" charset="-122"/>
+                <a:sym typeface="+mn-ea"/>
+              </a:rPr>
+              <a:t>MRC </a:t>
+            </a:r>
+            <a:r>
+              <a:rPr lang="zh-CN" altLang="en-US" sz="1200">
+                <a:latin typeface="微软雅黑" panose="020B0503020204020204" charset="-122"/>
+                <a:ea typeface="微软雅黑" panose="020B0503020204020204" charset="-122"/>
+                <a:cs typeface="微软雅黑" panose="020B0503020204020204" charset="-122"/>
+                <a:sym typeface="+mn-ea"/>
+              </a:rPr>
+              <a:t>之前，一条抖动链路被判定需维修时，会被管理性下线（</a:t>
+            </a:r>
+            <a:r>
+              <a:rPr lang="en-US" altLang="zh-CN" sz="1200">
+                <a:latin typeface="微软雅黑" panose="020B0503020204020204" charset="-122"/>
+                <a:ea typeface="微软雅黑" panose="020B0503020204020204" charset="-122"/>
+                <a:cs typeface="微软雅黑" panose="020B0503020204020204" charset="-122"/>
+                <a:sym typeface="+mn-ea"/>
+              </a:rPr>
+              <a:t>administratively taken down），</a:t>
+            </a:r>
+            <a:r>
+              <a:rPr lang="zh-CN" altLang="en-US" sz="1200">
+                <a:latin typeface="微软雅黑" panose="020B0503020204020204" charset="-122"/>
+                <a:ea typeface="微软雅黑" panose="020B0503020204020204" charset="-122"/>
+                <a:cs typeface="微软雅黑" panose="020B0503020204020204" charset="-122"/>
+                <a:sym typeface="+mn-ea"/>
+              </a:rPr>
+              <a:t>数据流量不能使用它，只有维修并测试通过后才恢复上线。</a:t>
+            </a:r>
+            <a:endParaRPr lang="zh-CN" altLang="en-US" sz="1200" b="0">
+              <a:solidFill>
+                <a:schemeClr val="tx1"/>
+              </a:solidFill>
+              <a:latin typeface="微软雅黑" panose="020B0503020204020204" charset="-122"/>
+              <a:ea typeface="微软雅黑" panose="020B0503020204020204" charset="-122"/>
+              <a:cs typeface="微软雅黑" panose="020B0503020204020204" charset="-122"/>
+            </a:endParaRPr>
+          </a:p>
+          <a:p>
+            <a:pPr>
+              <a:lnSpc>
+                <a:spcPts val="1425"/>
+              </a:lnSpc>
+            </a:pPr>
+            <a:r>
+              <a:rPr lang="zh-CN" altLang="en-US" sz="1200" b="0">
+                <a:solidFill>
+                  <a:schemeClr val="tx1"/>
+                </a:solidFill>
+                <a:latin typeface="微软雅黑" panose="020B0503020204020204" charset="-122"/>
+                <a:ea typeface="微软雅黑" panose="020B0503020204020204" charset="-122"/>
+                <a:cs typeface="微软雅黑" panose="020B0503020204020204" charset="-122"/>
+              </a:rPr>
+              <a:t>现在链路在维修期间保持服务：链路掉线时 </a:t>
+            </a:r>
+            <a:r>
+              <a:rPr lang="en-US" altLang="zh-CN" sz="1200" b="0">
+                <a:solidFill>
+                  <a:schemeClr val="tx1"/>
+                </a:solidFill>
+                <a:latin typeface="微软雅黑" panose="020B0503020204020204" charset="-122"/>
+                <a:ea typeface="微软雅黑" panose="020B0503020204020204" charset="-122"/>
+                <a:cs typeface="微软雅黑" panose="020B0503020204020204" charset="-122"/>
+              </a:rPr>
+              <a:t>MRC </a:t>
+            </a:r>
+            <a:r>
+              <a:rPr lang="zh-CN" altLang="en-US" sz="1200" b="0">
+                <a:solidFill>
+                  <a:schemeClr val="tx1"/>
+                </a:solidFill>
+                <a:latin typeface="微软雅黑" panose="020B0503020204020204" charset="-122"/>
+                <a:ea typeface="微软雅黑" panose="020B0503020204020204" charset="-122"/>
+                <a:cs typeface="微软雅黑" panose="020B0503020204020204" charset="-122"/>
+              </a:rPr>
+              <a:t>将其映射出去（不使用该</a:t>
+            </a:r>
+            <a:r>
+              <a:rPr lang="en-US" altLang="zh-CN" sz="1200" b="0">
+                <a:solidFill>
+                  <a:schemeClr val="tx1"/>
+                </a:solidFill>
+                <a:latin typeface="微软雅黑" panose="020B0503020204020204" charset="-122"/>
+                <a:ea typeface="微软雅黑" panose="020B0503020204020204" charset="-122"/>
+                <a:cs typeface="微软雅黑" panose="020B0503020204020204" charset="-122"/>
+              </a:rPr>
+              <a:t>EV），</a:t>
+            </a:r>
+            <a:r>
+              <a:rPr lang="zh-CN" altLang="en-US" sz="1200" b="0">
+                <a:solidFill>
+                  <a:schemeClr val="tx1"/>
+                </a:solidFill>
+                <a:latin typeface="微软雅黑" panose="020B0503020204020204" charset="-122"/>
+                <a:ea typeface="微软雅黑" panose="020B0503020204020204" charset="-122"/>
+                <a:cs typeface="微软雅黑" panose="020B0503020204020204" charset="-122"/>
+              </a:rPr>
+              <a:t>只有在一段时间内有足够多 </a:t>
+            </a:r>
+            <a:r>
+              <a:rPr lang="en-US" altLang="zh-CN" sz="1200" b="0">
+                <a:solidFill>
+                  <a:schemeClr val="tx1"/>
+                </a:solidFill>
+                <a:latin typeface="微软雅黑" panose="020B0503020204020204" charset="-122"/>
+                <a:ea typeface="微软雅黑" panose="020B0503020204020204" charset="-122"/>
+                <a:cs typeface="微软雅黑" panose="020B0503020204020204" charset="-122"/>
+              </a:rPr>
+              <a:t>probe </a:t>
+            </a:r>
+            <a:r>
+              <a:rPr lang="zh-CN" altLang="en-US" sz="1200" b="0">
+                <a:solidFill>
+                  <a:schemeClr val="tx1"/>
+                </a:solidFill>
+                <a:latin typeface="微软雅黑" panose="020B0503020204020204" charset="-122"/>
+                <a:ea typeface="微软雅黑" panose="020B0503020204020204" charset="-122"/>
+                <a:cs typeface="微软雅黑" panose="020B0503020204020204" charset="-122"/>
+              </a:rPr>
+              <a:t>成功时才把它带回。</a:t>
+            </a:r>
+            <a:endParaRPr lang="zh-CN" altLang="en-US" sz="1200" b="0">
+              <a:solidFill>
+                <a:schemeClr val="tx1"/>
+              </a:solidFill>
+              <a:latin typeface="微软雅黑" panose="020B0503020204020204" charset="-122"/>
+              <a:ea typeface="微软雅黑" panose="020B0503020204020204" charset="-122"/>
+              <a:cs typeface="微软雅黑" panose="020B0503020204020204" charset="-122"/>
+            </a:endParaRPr>
+          </a:p>
+          <a:p>
+            <a:pPr>
+              <a:lnSpc>
+                <a:spcPts val="1425"/>
+              </a:lnSpc>
+            </a:pPr>
+            <a:endParaRPr lang="en-US" altLang="zh-CN" sz="1200" b="0">
+              <a:solidFill>
+                <a:schemeClr val="tx1"/>
+              </a:solidFill>
+              <a:latin typeface="微软雅黑" panose="020B0503020204020204" charset="-122"/>
+              <a:ea typeface="微软雅黑" panose="020B0503020204020204" charset="-122"/>
+              <a:cs typeface="微软雅黑" panose="020B0503020204020204" charset="-122"/>
+            </a:endParaRPr>
+          </a:p>
+          <a:p>
+            <a:pPr>
+              <a:lnSpc>
+                <a:spcPts val="1425"/>
+              </a:lnSpc>
+            </a:pPr>
+            <a:r>
+              <a:rPr lang="en-US" altLang="zh-CN" sz="1200" b="0">
+                <a:solidFill>
+                  <a:schemeClr val="tx1"/>
+                </a:solidFill>
+                <a:latin typeface="微软雅黑" panose="020B0503020204020204" charset="-122"/>
+                <a:ea typeface="微软雅黑" panose="020B0503020204020204" charset="-122"/>
+                <a:cs typeface="微软雅黑" panose="020B0503020204020204" charset="-122"/>
+              </a:rPr>
+              <a:t>2</a:t>
+            </a:r>
+            <a:r>
+              <a:rPr lang="zh-CN" altLang="en-US" sz="1200" b="0">
+                <a:solidFill>
+                  <a:schemeClr val="tx1"/>
+                </a:solidFill>
+                <a:latin typeface="微软雅黑" panose="020B0503020204020204" charset="-122"/>
+                <a:ea typeface="微软雅黑" panose="020B0503020204020204" charset="-122"/>
+                <a:cs typeface="微软雅黑" panose="020B0503020204020204" charset="-122"/>
+              </a:rPr>
+              <a:t>，另外，交换机软件故障会导致控制平面与数据平面不一致，控制平面无法准确检测数据平面故障。</a:t>
+            </a:r>
+            <a:r>
+              <a:rPr lang="en-US" altLang="zh-CN" sz="1200" b="0">
+                <a:solidFill>
+                  <a:schemeClr val="tx1"/>
+                </a:solidFill>
+                <a:latin typeface="微软雅黑" panose="020B0503020204020204" charset="-122"/>
+                <a:ea typeface="微软雅黑" panose="020B0503020204020204" charset="-122"/>
+                <a:cs typeface="微软雅黑" panose="020B0503020204020204" charset="-122"/>
+              </a:rPr>
+              <a:t>OpenAI</a:t>
+            </a:r>
+            <a:r>
+              <a:rPr lang="zh-CN" altLang="en-US" sz="1200" b="0">
+                <a:solidFill>
+                  <a:schemeClr val="tx1"/>
+                </a:solidFill>
+                <a:latin typeface="微软雅黑" panose="020B0503020204020204" charset="-122"/>
+                <a:ea typeface="微软雅黑" panose="020B0503020204020204" charset="-122"/>
+                <a:cs typeface="微软雅黑" panose="020B0503020204020204" charset="-122"/>
+              </a:rPr>
+              <a:t>实际观测到，控制平面和链路都正常，但交换机停止转发数据包。</a:t>
+            </a:r>
+            <a:endParaRPr lang="zh-CN" altLang="en-US" sz="1200" b="0">
+              <a:solidFill>
+                <a:schemeClr val="tx1"/>
+              </a:solidFill>
+              <a:latin typeface="微软雅黑" panose="020B0503020204020204" charset="-122"/>
+              <a:ea typeface="微软雅黑" panose="020B0503020204020204" charset="-122"/>
+              <a:cs typeface="微软雅黑" panose="020B0503020204020204" charset="-122"/>
+            </a:endParaRPr>
+          </a:p>
+        </p:txBody>
+      </p:sp>
+    </p:spTree>
+  </p:cSld>
+  <p:clrMapOvr>
+    <a:masterClrMapping/>
+  </p:clrMapOvr>
+</p:sld>
+</file>
+
+<file path=ppt/slides/slide5.xml><?xml version="1.0" encoding="utf-8"?>
+<p:sld xmlns:a="http://schemas.openxmlformats.org/drawingml/2006/main" xmlns:r="http://schemas.openxmlformats.org/officeDocument/2006/relationships" xmlns:p="http://schemas.openxmlformats.org/presentationml/2006/main">
+  <p:cSld>
+    <p:spTree>
+      <p:nvGrpSpPr>
+        <p:cNvPr id="1" name=""/>
+        <p:cNvGrpSpPr/>
+        <p:nvPr/>
+      </p:nvGrpSpPr>
+      <p:grpSpPr/>
+      <p:sp>
+        <p:nvSpPr>
+          <p:cNvPr id="2" name="标题 1"/>
+          <p:cNvSpPr>
+            <a:spLocks noGrp="1"/>
+          </p:cNvSpPr>
           <p:nvPr>
             <p:ph type="title"/>
           </p:nvPr>
         </p:nvSpPr>
-        <p:spPr/>
+        <p:spPr>
+          <a:xfrm>
+            <a:off x="191770" y="1382395"/>
+            <a:ext cx="4335780" cy="353695"/>
+          </a:xfrm>
+        </p:spPr>
         <p:txBody>
           <a:bodyPr/>
           <a:p>
-            <a:r>
-              <a:rPr lang="en-US" altLang="zh-CN"/>
+            <a:pPr algn="ctr"/>
+            <a:r>
+              <a:rPr lang="en-US" altLang="zh-CN" sz="1600"/>
               <a:t>REPS</a:t>
             </a:r>
             <a:r>
-              <a:rPr lang="zh-CN" altLang="en-US"/>
-              <a:t>论文分析</a:t>
-            </a:r>
-            <a:endParaRPr lang="zh-CN" altLang="en-US"/>
+              <a:rPr lang="zh-CN" altLang="en-US" sz="1600"/>
+              <a:t>：基于源路由规避故障的逐包负载均衡</a:t>
+            </a:r>
+            <a:endParaRPr lang="zh-CN" altLang="en-US" sz="1600"/>
           </a:p>
         </p:txBody>
       </p:sp>
@@ -4741,8 +6111,8 @@
         </p:blipFill>
         <p:spPr>
           <a:xfrm>
-            <a:off x="838200" y="2150745"/>
-            <a:ext cx="5006340" cy="3202940"/>
+            <a:off x="343535" y="1852930"/>
+            <a:ext cx="4034155" cy="2581275"/>
           </a:xfrm>
           <a:prstGeom prst="rect">
             <a:avLst/>
@@ -4757,8 +6127,8 @@
         </p:nvSpPr>
         <p:spPr>
           <a:xfrm>
-            <a:off x="7192645" y="3928745"/>
-            <a:ext cx="4064000" cy="1198880"/>
+            <a:off x="343535" y="4631690"/>
+            <a:ext cx="4033520" cy="1753235"/>
           </a:xfrm>
           <a:prstGeom prst="rect">
             <a:avLst/>
@@ -4771,56 +6141,313 @@
           </a:bodyPr>
           <a:p>
             <a:r>
-              <a:rPr lang="zh-CN" altLang="en-US"/>
-              <a:t>通过丢包检测故障</a:t>
-            </a:r>
-            <a:endParaRPr lang="zh-CN" altLang="en-US"/>
-          </a:p>
-          <a:p>
-            <a:r>
-              <a:rPr lang="zh-CN" altLang="en-US"/>
-              <a:t>通过超时识别丢包</a:t>
-            </a:r>
-            <a:endParaRPr lang="zh-CN" altLang="en-US"/>
-          </a:p>
-          <a:p>
-            <a:r>
-              <a:rPr lang="zh-CN" altLang="en-US"/>
-              <a:t>丢包类别：故障丢包，拥塞丢包</a:t>
-            </a:r>
-            <a:endParaRPr lang="zh-CN" altLang="en-US"/>
-          </a:p>
-          <a:p>
-            <a:r>
-              <a:rPr lang="zh-CN" altLang="en-US"/>
-              <a:t>两种方式区分丢包：</a:t>
-            </a:r>
-            <a:r>
-              <a:rPr lang="en-US" altLang="zh-CN"/>
-              <a:t>trimming</a:t>
-            </a:r>
-            <a:r>
-              <a:rPr lang="zh-CN" altLang="en-US"/>
-              <a:t>、或</a:t>
-            </a:r>
-            <a:r>
-              <a:rPr lang="en-US" altLang="zh-CN"/>
-              <a:t>RTT</a:t>
-            </a:r>
-            <a:endParaRPr lang="en-US" altLang="zh-CN"/>
-          </a:p>
-        </p:txBody>
-      </p:sp>
-      <p:sp>
-        <p:nvSpPr>
-          <p:cNvPr id="6" name="文本框 5"/>
+              <a:rPr lang="zh-CN" altLang="en-US" sz="1400">
+                <a:latin typeface="微软雅黑" panose="020B0503020204020204" charset="-122"/>
+                <a:ea typeface="微软雅黑" panose="020B0503020204020204" charset="-122"/>
+                <a:cs typeface="微软雅黑" panose="020B0503020204020204" charset="-122"/>
+              </a:rPr>
+              <a:t>源路由：发送端配</a:t>
+            </a:r>
+            <a:r>
+              <a:rPr lang="en-US" altLang="zh-CN" sz="1400">
+                <a:latin typeface="微软雅黑" panose="020B0503020204020204" charset="-122"/>
+                <a:ea typeface="微软雅黑" panose="020B0503020204020204" charset="-122"/>
+                <a:cs typeface="微软雅黑" panose="020B0503020204020204" charset="-122"/>
+              </a:rPr>
+              <a:t>UDP sport + </a:t>
+            </a:r>
+            <a:r>
+              <a:rPr lang="zh-CN" altLang="en-US" sz="1400">
+                <a:latin typeface="微软雅黑" panose="020B0503020204020204" charset="-122"/>
+                <a:ea typeface="微软雅黑" panose="020B0503020204020204" charset="-122"/>
+                <a:cs typeface="微软雅黑" panose="020B0503020204020204" charset="-122"/>
+              </a:rPr>
+              <a:t>交换机哈希</a:t>
+            </a:r>
+            <a:endParaRPr lang="zh-CN" altLang="en-US" sz="1400">
+              <a:latin typeface="微软雅黑" panose="020B0503020204020204" charset="-122"/>
+              <a:ea typeface="微软雅黑" panose="020B0503020204020204" charset="-122"/>
+              <a:cs typeface="微软雅黑" panose="020B0503020204020204" charset="-122"/>
+            </a:endParaRPr>
+          </a:p>
+          <a:p>
+            <a:endParaRPr lang="zh-CN" altLang="en-US" sz="1400">
+              <a:latin typeface="微软雅黑" panose="020B0503020204020204" charset="-122"/>
+              <a:ea typeface="微软雅黑" panose="020B0503020204020204" charset="-122"/>
+              <a:cs typeface="微软雅黑" panose="020B0503020204020204" charset="-122"/>
+            </a:endParaRPr>
+          </a:p>
+          <a:p>
+            <a:r>
+              <a:rPr lang="zh-CN" altLang="en-US" sz="1400">
+                <a:latin typeface="微软雅黑" panose="020B0503020204020204" charset="-122"/>
+                <a:ea typeface="微软雅黑" panose="020B0503020204020204" charset="-122"/>
+                <a:cs typeface="微软雅黑" panose="020B0503020204020204" charset="-122"/>
+              </a:rPr>
+              <a:t>核心流程：负载均衡随机喷洒，并持续缓存</a:t>
+            </a:r>
+            <a:r>
+              <a:rPr lang="en-US" altLang="zh-CN" sz="1400">
+                <a:latin typeface="微软雅黑" panose="020B0503020204020204" charset="-122"/>
+                <a:ea typeface="微软雅黑" panose="020B0503020204020204" charset="-122"/>
+                <a:cs typeface="微软雅黑" panose="020B0503020204020204" charset="-122"/>
+              </a:rPr>
+              <a:t>8</a:t>
+            </a:r>
+            <a:r>
+              <a:rPr lang="zh-CN" altLang="en-US" sz="1400">
+                <a:latin typeface="微软雅黑" panose="020B0503020204020204" charset="-122"/>
+                <a:ea typeface="微软雅黑" panose="020B0503020204020204" charset="-122"/>
+                <a:cs typeface="微软雅黑" panose="020B0503020204020204" charset="-122"/>
+              </a:rPr>
+              <a:t>条轻载路径，供故障使用</a:t>
+            </a:r>
+            <a:endParaRPr lang="zh-CN" altLang="en-US" sz="1400">
+              <a:latin typeface="微软雅黑" panose="020B0503020204020204" charset="-122"/>
+              <a:ea typeface="微软雅黑" panose="020B0503020204020204" charset="-122"/>
+              <a:cs typeface="微软雅黑" panose="020B0503020204020204" charset="-122"/>
+            </a:endParaRPr>
+          </a:p>
+          <a:p>
+            <a:endParaRPr lang="en-US" altLang="zh-CN" sz="1400">
+              <a:latin typeface="微软雅黑" panose="020B0503020204020204" charset="-122"/>
+              <a:ea typeface="微软雅黑" panose="020B0503020204020204" charset="-122"/>
+              <a:cs typeface="微软雅黑" panose="020B0503020204020204" charset="-122"/>
+            </a:endParaRPr>
+          </a:p>
+          <a:p>
+            <a:r>
+              <a:rPr lang="zh-CN" altLang="en-US" sz="1400">
+                <a:latin typeface="微软雅黑" panose="020B0503020204020204" charset="-122"/>
+                <a:ea typeface="微软雅黑" panose="020B0503020204020204" charset="-122"/>
+                <a:cs typeface="微软雅黑" panose="020B0503020204020204" charset="-122"/>
+              </a:rPr>
+              <a:t>故障检测：基于超时感知丢包，从丢包识别故障丢包</a:t>
+            </a:r>
+            <a:endParaRPr lang="zh-CN" altLang="en-US" sz="1400">
+              <a:latin typeface="微软雅黑" panose="020B0503020204020204" charset="-122"/>
+              <a:ea typeface="微软雅黑" panose="020B0503020204020204" charset="-122"/>
+              <a:cs typeface="微软雅黑" panose="020B0503020204020204" charset="-122"/>
+            </a:endParaRPr>
+          </a:p>
+          <a:p>
+            <a:pPr marL="171450" indent="-171450">
+              <a:buFont typeface="Arial" panose="020B0604020202020204" pitchFamily="34" charset="0"/>
+              <a:buChar char="•"/>
+            </a:pPr>
+            <a:r>
+              <a:rPr lang="en-US" altLang="zh-CN" sz="1000">
+                <a:latin typeface="微软雅黑" panose="020B0503020204020204" charset="-122"/>
+                <a:ea typeface="微软雅黑" panose="020B0503020204020204" charset="-122"/>
+                <a:cs typeface="微软雅黑" panose="020B0503020204020204" charset="-122"/>
+              </a:rPr>
+              <a:t>packet trimming</a:t>
+            </a:r>
+            <a:r>
+              <a:rPr lang="zh-CN" altLang="en-US" sz="1000">
+                <a:latin typeface="微软雅黑" panose="020B0503020204020204" charset="-122"/>
+                <a:ea typeface="微软雅黑" panose="020B0503020204020204" charset="-122"/>
+                <a:cs typeface="微软雅黑" panose="020B0503020204020204" charset="-122"/>
+              </a:rPr>
+              <a:t>方法</a:t>
+            </a:r>
+            <a:r>
+              <a:rPr lang="en-US" altLang="zh-CN" sz="1000">
+                <a:latin typeface="微软雅黑" panose="020B0503020204020204" charset="-122"/>
+                <a:ea typeface="微软雅黑" panose="020B0503020204020204" charset="-122"/>
+                <a:cs typeface="微软雅黑" panose="020B0503020204020204" charset="-122"/>
+              </a:rPr>
+              <a:t> </a:t>
+            </a:r>
+            <a:r>
+              <a:rPr lang="zh-CN" altLang="en-US" sz="1000">
+                <a:latin typeface="微软雅黑" panose="020B0503020204020204" charset="-122"/>
+                <a:ea typeface="微软雅黑" panose="020B0503020204020204" charset="-122"/>
+                <a:cs typeface="微软雅黑" panose="020B0503020204020204" charset="-122"/>
+              </a:rPr>
+              <a:t>或</a:t>
+            </a:r>
+            <a:r>
+              <a:rPr lang="en-US" altLang="zh-CN" sz="1000">
+                <a:latin typeface="微软雅黑" panose="020B0503020204020204" charset="-122"/>
+                <a:ea typeface="微软雅黑" panose="020B0503020204020204" charset="-122"/>
+                <a:cs typeface="微软雅黑" panose="020B0503020204020204" charset="-122"/>
+              </a:rPr>
+              <a:t> timeout</a:t>
+            </a:r>
+            <a:r>
+              <a:rPr lang="zh-CN" altLang="en-US" sz="1000">
+                <a:latin typeface="微软雅黑" panose="020B0503020204020204" charset="-122"/>
+                <a:ea typeface="微软雅黑" panose="020B0503020204020204" charset="-122"/>
+                <a:cs typeface="微软雅黑" panose="020B0503020204020204" charset="-122"/>
+              </a:rPr>
+              <a:t>经验法</a:t>
+            </a:r>
+            <a:endParaRPr lang="zh-CN" altLang="en-US" sz="1000">
+              <a:latin typeface="微软雅黑" panose="020B0503020204020204" charset="-122"/>
+              <a:ea typeface="微软雅黑" panose="020B0503020204020204" charset="-122"/>
+              <a:cs typeface="微软雅黑" panose="020B0503020204020204" charset="-122"/>
+            </a:endParaRPr>
+          </a:p>
+        </p:txBody>
+      </p:sp>
+      <p:sp>
+        <p:nvSpPr>
+          <p:cNvPr id="3" name="标题 1"/>
+          <p:cNvSpPr>
+            <a:spLocks noGrp="1"/>
+          </p:cNvSpPr>
+          <p:nvPr/>
+        </p:nvSpPr>
+        <p:spPr>
+          <a:xfrm>
+            <a:off x="838200" y="134620"/>
+            <a:ext cx="10515600" cy="730250"/>
+          </a:xfrm>
+          <a:prstGeom prst="rect">
+            <a:avLst/>
+          </a:prstGeom>
+        </p:spPr>
+        <p:txBody>
+          <a:bodyPr vert="horz" lIns="91440" tIns="45720" rIns="91440" bIns="45720" rtlCol="0" anchor="ctr" anchorCtr="0"/>
+          <a:lstStyle>
+            <a:lvl1pPr algn="l" defTabSz="914400" rtl="0" eaLnBrk="1" latinLnBrk="0" hangingPunct="1">
+              <a:lnSpc>
+                <a:spcPct val="90000"/>
+              </a:lnSpc>
+              <a:spcBef>
+                <a:spcPct val="0"/>
+              </a:spcBef>
+              <a:buNone/>
+              <a:defRPr sz="4400" kern="1200">
+                <a:solidFill>
+                  <a:schemeClr val="tx1"/>
+                </a:solidFill>
+                <a:latin typeface="+mj-lt"/>
+                <a:ea typeface="+mj-ea"/>
+                <a:cs typeface="+mj-cs"/>
+              </a:defRPr>
+            </a:lvl1pPr>
+          </a:lstStyle>
+          <a:p>
+            <a:r>
+              <a:rPr lang="zh-CN" altLang="en-US" sz="2800"/>
+              <a:t>智算网络下的逐包负载均衡</a:t>
+            </a:r>
+            <a:endParaRPr lang="zh-CN" altLang="en-US" sz="2800"/>
+          </a:p>
+        </p:txBody>
+      </p:sp>
+      <p:sp>
+        <p:nvSpPr>
+          <p:cNvPr id="6" name="标题 1"/>
+          <p:cNvSpPr>
+            <a:spLocks noGrp="1"/>
+          </p:cNvSpPr>
+          <p:nvPr/>
+        </p:nvSpPr>
+        <p:spPr>
+          <a:xfrm>
+            <a:off x="4733925" y="1382395"/>
+            <a:ext cx="3775710" cy="353695"/>
+          </a:xfrm>
+          <a:prstGeom prst="rect">
+            <a:avLst/>
+          </a:prstGeom>
+        </p:spPr>
+        <p:txBody>
+          <a:bodyPr vert="horz" lIns="91440" tIns="45720" rIns="91440" bIns="45720" rtlCol="0" anchor="ctr">
+            <a:normAutofit/>
+          </a:bodyPr>
+          <a:lstStyle>
+            <a:lvl1pPr algn="l" defTabSz="914400" rtl="0" eaLnBrk="1" latinLnBrk="0" hangingPunct="1">
+              <a:lnSpc>
+                <a:spcPct val="90000"/>
+              </a:lnSpc>
+              <a:spcBef>
+                <a:spcPct val="0"/>
+              </a:spcBef>
+              <a:buNone/>
+              <a:defRPr sz="4400" kern="1200">
+                <a:solidFill>
+                  <a:schemeClr val="tx1"/>
+                </a:solidFill>
+                <a:latin typeface="+mj-lt"/>
+                <a:ea typeface="+mj-ea"/>
+                <a:cs typeface="+mj-cs"/>
+              </a:defRPr>
+            </a:lvl1pPr>
+          </a:lstStyle>
+          <a:p>
+            <a:pPr algn="ctr"/>
+            <a:r>
+              <a:rPr lang="en-US" altLang="zh-CN" sz="1600"/>
+              <a:t>veRoCE</a:t>
+            </a:r>
+            <a:endParaRPr lang="en-US" altLang="zh-CN" sz="1600"/>
+          </a:p>
+        </p:txBody>
+      </p:sp>
+      <p:sp>
+        <p:nvSpPr>
+          <p:cNvPr id="7" name="标题 1"/>
+          <p:cNvSpPr>
+            <a:spLocks noGrp="1"/>
+          </p:cNvSpPr>
+          <p:nvPr/>
+        </p:nvSpPr>
+        <p:spPr>
+          <a:xfrm>
+            <a:off x="8715375" y="1382395"/>
+            <a:ext cx="3391535" cy="353695"/>
+          </a:xfrm>
+          <a:prstGeom prst="rect">
+            <a:avLst/>
+          </a:prstGeom>
+        </p:spPr>
+        <p:txBody>
+          <a:bodyPr vert="horz" lIns="91440" tIns="45720" rIns="91440" bIns="45720" rtlCol="0" anchor="ctr">
+            <a:normAutofit/>
+          </a:bodyPr>
+          <a:lstStyle>
+            <a:lvl1pPr algn="l" defTabSz="914400" rtl="0" eaLnBrk="1" latinLnBrk="0" hangingPunct="1">
+              <a:lnSpc>
+                <a:spcPct val="90000"/>
+              </a:lnSpc>
+              <a:spcBef>
+                <a:spcPct val="0"/>
+              </a:spcBef>
+              <a:buNone/>
+              <a:defRPr sz="4400" kern="1200">
+                <a:solidFill>
+                  <a:schemeClr val="tx1"/>
+                </a:solidFill>
+                <a:latin typeface="+mj-lt"/>
+                <a:ea typeface="+mj-ea"/>
+                <a:cs typeface="+mj-cs"/>
+              </a:defRPr>
+            </a:lvl1pPr>
+          </a:lstStyle>
+          <a:p>
+            <a:pPr algn="ctr"/>
+            <a:r>
+              <a:rPr lang="en-US" altLang="zh-CN" sz="1600"/>
+              <a:t>MRC</a:t>
+            </a:r>
+            <a:endParaRPr lang="en-US" altLang="zh-CN" sz="1600"/>
+          </a:p>
+        </p:txBody>
+      </p:sp>
+      <p:sp>
+        <p:nvSpPr>
+          <p:cNvPr id="8" name="文本框 7"/>
           <p:cNvSpPr txBox="1"/>
           <p:nvPr/>
         </p:nvSpPr>
         <p:spPr>
           <a:xfrm>
-            <a:off x="7319645" y="1824990"/>
-            <a:ext cx="4064000" cy="368300"/>
+            <a:off x="6296025" y="3524885"/>
+            <a:ext cx="4064000" cy="1476375"/>
           </a:xfrm>
           <a:prstGeom prst="rect">
             <a:avLst/>
@@ -4833,18 +6460,38 @@
           </a:bodyPr>
           <a:p>
             <a:r>
+              <a:rPr lang="zh-CN" altLang="en-US"/>
+              <a:t>本页应该只讲</a:t>
+            </a:r>
+            <a:r>
               <a:rPr lang="en-US" altLang="zh-CN"/>
-              <a:t>8</a:t>
-            </a:r>
-            <a:r>
-              <a:rPr lang="zh-CN" altLang="en-US"/>
-              <a:t>个</a:t>
-            </a:r>
+              <a:t>EV-based LB</a:t>
+            </a:r>
+            <a:endParaRPr lang="en-US" altLang="zh-CN"/>
+          </a:p>
+          <a:p>
+            <a:endParaRPr lang="en-US" altLang="zh-CN"/>
+          </a:p>
+          <a:p>
             <a:r>
               <a:rPr lang="en-US" altLang="zh-CN"/>
               <a:t>EV</a:t>
             </a:r>
-            <a:endParaRPr lang="en-US" altLang="zh-CN"/>
+            <a:r>
+              <a:rPr lang="zh-CN" altLang="en-US"/>
+              <a:t>有多少、怎么维护，怎么换路</a:t>
+            </a:r>
+            <a:endParaRPr lang="zh-CN" altLang="en-US"/>
+          </a:p>
+          <a:p>
+            <a:endParaRPr lang="zh-CN" altLang="en-US"/>
+          </a:p>
+          <a:p>
+            <a:r>
+              <a:rPr lang="zh-CN" altLang="en-US"/>
+              <a:t>怎么检测故障，</a:t>
+            </a:r>
+            <a:endParaRPr lang="zh-CN" altLang="en-US"/>
           </a:p>
         </p:txBody>
       </p:sp>
@@ -4856,7 +6503,149 @@
 </p:sld>
 </file>
 
-<file path=ppt/slides/slide4.xml><?xml version="1.0" encoding="utf-8"?>
+<file path=ppt/slides/slide6.xml><?xml version="1.0" encoding="utf-8"?>
+<p:sld xmlns:a="http://schemas.openxmlformats.org/drawingml/2006/main" xmlns:r="http://schemas.openxmlformats.org/officeDocument/2006/relationships" xmlns:p="http://schemas.openxmlformats.org/presentationml/2006/main">
+  <p:cSld>
+    <p:spTree>
+      <p:nvGrpSpPr>
+        <p:cNvPr id="1" name=""/>
+        <p:cNvGrpSpPr/>
+        <p:nvPr/>
+      </p:nvGrpSpPr>
+      <p:grpSpPr/>
+      <p:sp>
+        <p:nvSpPr>
+          <p:cNvPr id="2" name="标题 1"/>
+          <p:cNvSpPr>
+            <a:spLocks noGrp="1"/>
+          </p:cNvSpPr>
+          <p:nvPr>
+            <p:ph type="title"/>
+          </p:nvPr>
+        </p:nvSpPr>
+        <p:spPr/>
+        <p:txBody>
+          <a:bodyPr/>
+          <a:p>
+            <a:r>
+              <a:rPr lang="en-US" altLang="zh-CN"/>
+              <a:t>UBG</a:t>
+            </a:r>
+            <a:r>
+              <a:rPr lang="zh-CN" altLang="zh-CN"/>
+              <a:t>负载均衡</a:t>
+            </a:r>
+            <a:endParaRPr lang="zh-CN" altLang="zh-CN"/>
+          </a:p>
+        </p:txBody>
+      </p:sp>
+      <p:sp>
+        <p:nvSpPr>
+          <p:cNvPr id="3" name="文本框 2"/>
+          <p:cNvSpPr txBox="1"/>
+          <p:nvPr/>
+        </p:nvSpPr>
+        <p:spPr>
+          <a:xfrm>
+            <a:off x="1078230" y="2891790"/>
+            <a:ext cx="8378190" cy="2306955"/>
+          </a:xfrm>
+          <a:prstGeom prst="rect">
+            <a:avLst/>
+          </a:prstGeom>
+          <a:noFill/>
+        </p:spPr>
+        <p:txBody>
+          <a:bodyPr wrap="square" rtlCol="0">
+            <a:spAutoFit/>
+          </a:bodyPr>
+          <a:p>
+            <a:r>
+              <a:rPr lang="zh-CN" altLang="en-US"/>
+              <a:t>逐流：单</a:t>
+            </a:r>
+            <a:r>
+              <a:rPr lang="en-US" altLang="zh-CN"/>
+              <a:t>TP</a:t>
+            </a:r>
+            <a:r>
+              <a:rPr lang="zh-CN" altLang="en-US"/>
+              <a:t>、多</a:t>
+            </a:r>
+            <a:r>
+              <a:rPr lang="en-US" altLang="zh-CN"/>
+              <a:t>TP</a:t>
+            </a:r>
+            <a:endParaRPr lang="zh-CN" altLang="en-US"/>
+          </a:p>
+          <a:p>
+            <a:r>
+              <a:rPr lang="zh-CN" altLang="en-US"/>
+              <a:t>逐包：</a:t>
+            </a:r>
+            <a:endParaRPr lang="zh-CN" altLang="en-US"/>
+          </a:p>
+          <a:p>
+            <a:r>
+              <a:rPr lang="zh-CN" altLang="en-US"/>
+              <a:t>乱序接收</a:t>
+            </a:r>
+            <a:endParaRPr lang="zh-CN" altLang="en-US"/>
+          </a:p>
+          <a:p>
+            <a:endParaRPr lang="zh-CN" altLang="en-US"/>
+          </a:p>
+          <a:p>
+            <a:r>
+              <a:rPr lang="zh-CN" altLang="en-US"/>
+              <a:t>故障恢复时间？</a:t>
+            </a:r>
+            <a:endParaRPr lang="zh-CN" altLang="en-US"/>
+          </a:p>
+          <a:p>
+            <a:r>
+              <a:rPr lang="en-US" altLang="zh-CN"/>
+              <a:t>CBFC</a:t>
+            </a:r>
+            <a:r>
+              <a:rPr lang="zh-CN" altLang="en-US"/>
+              <a:t>机制下，故障是什么现象？</a:t>
+            </a:r>
+            <a:endParaRPr lang="zh-CN" altLang="en-US"/>
+          </a:p>
+          <a:p>
+            <a:endParaRPr lang="zh-CN" altLang="en-US"/>
+          </a:p>
+          <a:p>
+            <a:r>
+              <a:rPr lang="en-US" altLang="zh-CN"/>
+              <a:t>UB</a:t>
+            </a:r>
+            <a:r>
+              <a:rPr lang="zh-CN" altLang="en-US"/>
+              <a:t>无损，没有</a:t>
+            </a:r>
+            <a:r>
+              <a:rPr lang="en-US" altLang="zh-CN"/>
+              <a:t>trimming</a:t>
+            </a:r>
+            <a:r>
+              <a:rPr lang="zh-CN" altLang="en-US"/>
+              <a:t>，但仍然会有故障，所以解决方案会有何不同？</a:t>
+            </a:r>
+            <a:endParaRPr lang="zh-CN" altLang="en-US"/>
+          </a:p>
+        </p:txBody>
+      </p:sp>
+    </p:spTree>
+  </p:cSld>
+  <p:clrMapOvr>
+    <a:masterClrMapping/>
+  </p:clrMapOvr>
+</p:sld>
+</file>
+
+<file path=ppt/slides/slide7.xml><?xml version="1.0" encoding="utf-8"?>
 <p:sld xmlns:a="http://schemas.openxmlformats.org/drawingml/2006/main" xmlns:r="http://schemas.openxmlformats.org/officeDocument/2006/relationships" xmlns:p="http://schemas.openxmlformats.org/presentationml/2006/main">
   <p:cSld>
     <p:spTree>
@@ -4971,6 +6760,76 @@
             <a:r>
               <a:rPr lang="zh-CN" altLang="en-US"/>
               <a:t>来更快检测到故障，但复杂度稍高</a:t>
+            </a:r>
+            <a:endParaRPr lang="zh-CN" altLang="en-US"/>
+          </a:p>
+        </p:txBody>
+      </p:sp>
+    </p:spTree>
+  </p:cSld>
+  <p:clrMapOvr>
+    <a:masterClrMapping/>
+  </p:clrMapOvr>
+</p:sld>
+</file>
+
+<file path=ppt/slides/slide8.xml><?xml version="1.0" encoding="utf-8"?>
+<p:sld xmlns:a="http://schemas.openxmlformats.org/drawingml/2006/main" xmlns:r="http://schemas.openxmlformats.org/officeDocument/2006/relationships" xmlns:p="http://schemas.openxmlformats.org/presentationml/2006/main">
+  <p:cSld>
+    <p:spTree>
+      <p:nvGrpSpPr>
+        <p:cNvPr id="1" name=""/>
+        <p:cNvGrpSpPr/>
+        <p:nvPr/>
+      </p:nvGrpSpPr>
+      <p:grpSpPr/>
+      <p:sp>
+        <p:nvSpPr>
+          <p:cNvPr id="2" name="文本框 1"/>
+          <p:cNvSpPr txBox="1"/>
+          <p:nvPr/>
+        </p:nvSpPr>
+        <p:spPr>
+          <a:xfrm>
+            <a:off x="2349500" y="1170305"/>
+            <a:ext cx="4064000" cy="645160"/>
+          </a:xfrm>
+          <a:prstGeom prst="rect">
+            <a:avLst/>
+          </a:prstGeom>
+          <a:noFill/>
+        </p:spPr>
+        <p:txBody>
+          <a:bodyPr wrap="square" rtlCol="0">
+            <a:spAutoFit/>
+          </a:bodyPr>
+          <a:p>
+            <a:r>
+              <a:rPr lang="zh-CN" altLang="en-US"/>
+              <a:t>链路故障的测试用例，怎么设计的</a:t>
+            </a:r>
+            <a:endParaRPr lang="zh-CN" altLang="en-US"/>
+          </a:p>
+          <a:p>
+            <a:r>
+              <a:rPr lang="zh-CN" altLang="en-US"/>
+              <a:t>（着重参考</a:t>
+            </a:r>
+            <a:r>
+              <a:rPr lang="en-US" altLang="zh-CN"/>
+              <a:t>MRC</a:t>
+            </a:r>
+            <a:r>
+              <a:rPr lang="zh-CN" altLang="en-US"/>
+              <a:t>、</a:t>
+            </a:r>
+            <a:r>
+              <a:rPr lang="en-US" altLang="zh-CN"/>
+              <a:t>REPS</a:t>
+            </a:r>
+            <a:r>
+              <a:rPr lang="zh-CN" altLang="en-US"/>
+              <a:t>）</a:t>
             </a:r>
             <a:endParaRPr lang="zh-CN" altLang="en-US"/>
           </a:p>
